--- a/Project_template/tomography_TT/FWANT_TT_notes.pptx
+++ b/Project_template/tomography_TT/FWANT_TT_notes.pptx
@@ -1,6 +1,6 @@
 
 <file path=ppt/presentation.xml><?xml version="1.0" encoding="utf-8"?>
-<p:presentation xmlns:a="http://schemas.openxmlformats.org/drawingml/2006/main" xmlns:r="http://schemas.openxmlformats.org/officeDocument/2006/relationships" xmlns:p="http://schemas.openxmlformats.org/presentationml/2006/main" saveSubsetFonts="1" autoCompressPictures="0">
+<p:presentation xmlns:a="http://schemas.openxmlformats.org/drawingml/2006/main" xmlns:r="http://schemas.openxmlformats.org/officeDocument/2006/relationships" xmlns:p="http://schemas.openxmlformats.org/presentationml/2006/main" embedTrueTypeFonts="1" saveSubsetFonts="1" autoCompressPictures="0">
   <p:sldMasterIdLst>
     <p:sldMasterId id="2147483648" r:id="rId1"/>
   </p:sldMasterIdLst>
@@ -13,12 +13,22 @@
     <p:sldId id="261" r:id="rId7"/>
     <p:sldId id="262" r:id="rId8"/>
     <p:sldId id="263" r:id="rId9"/>
+    <p:sldId id="264" r:id="rId10"/>
+    <p:sldId id="265" r:id="rId11"/>
+    <p:sldId id="266" r:id="rId12"/>
   </p:sldIdLst>
   <p:notesMasterIdLst>
-    <p:notesMasterId r:id="rId10"/>
+    <p:notesMasterId r:id="rId13"/>
   </p:notesMasterIdLst>
   <p:sldSz cx="12192000" cy="6858000"/>
   <p:notesSz cx="6858000" cy="12192000"/>
+  <p:embeddedFontLst>
+    <p:embeddedFont>
+      <p:font typeface="EB Garamond" pitchFamily="18" charset="0"/>
+      <p:regular r:id="rId18"/>
+      <p:bold r:id="rId19"/>
+    </p:embeddedFont>
+  </p:embeddedFontLst>
   <p:defaultTextStyle>
     <a:lvl1pPr marL="0" algn="l" defTabSz="914400" rtl="0" eaLnBrk="1" latinLnBrk="0" hangingPunct="1">
       <a:defRPr sz="1800" kern="1200">
@@ -551,6 +561,182 @@
 </p:notes>
 </file>
 
+<file path=ppt/notesSlides/notesSlide10.xml><?xml version="1.0" encoding="utf-8"?>
+<p:notes xmlns:a="http://schemas.openxmlformats.org/drawingml/2006/main" xmlns:r="http://schemas.openxmlformats.org/officeDocument/2006/relationships" xmlns:p="http://schemas.openxmlformats.org/presentationml/2006/main">
+  <p:cSld>
+    <p:spTree>
+      <p:nvGrpSpPr>
+        <p:cNvPr id="1" name=""/>
+        <p:cNvGrpSpPr/>
+        <p:nvPr/>
+      </p:nvGrpSpPr>
+      <p:grpSpPr>
+        <a:xfrm>
+          <a:off x="0" y="0"/>
+          <a:ext cx="0" cy="0"/>
+          <a:chOff x="0" y="0"/>
+          <a:chExt cx="0" cy="0"/>
+        </a:xfrm>
+      </p:grpSpPr>
+      <p:sp>
+        <p:nvSpPr>
+          <p:cNvPr id="2" name="Slide Image Placeholder 1"/>
+          <p:cNvSpPr>
+            <a:spLocks noGrp="1" noRot="1" noChangeAspect="1"/>
+          </p:cNvSpPr>
+          <p:nvPr>
+            <p:ph type="sldImg"/>
+          </p:nvPr>
+        </p:nvSpPr>
+        <p:spPr/>
+      </p:sp>
+      <p:sp>
+        <p:nvSpPr>
+          <p:cNvPr id="3" name="Notes Placeholder 2"/>
+          <p:cNvSpPr>
+            <a:spLocks noGrp="1"/>
+          </p:cNvSpPr>
+          <p:nvPr>
+            <p:ph type="body" idx="1"/>
+          </p:nvPr>
+        </p:nvSpPr>
+        <p:spPr/>
+        <p:txBody>
+          <a:bodyPr/>
+          <a:lstStyle/>
+          <a:p>
+            <a:r>
+              <a:rPr lang="en-US" dirty="0"/>
+              <a:t>The memory figure is for the ZZ run, relative to the old code. The FFT speed-up is from the student's modified version of the old ZZ code in a sandbox test (transform length the next power of two at or above 2 nt - 1, 16 FFTs per cell for ZZ); it is not part of the fxyz code yet. The plan is to port it into SI_ker_sta_fxyz after the student finishes the full validation, and to use the current fxyz version until then.</a:t>
+            </a:r>
+            <a:endParaRPr lang="en-US" dirty="0"/>
+          </a:p>
+        </p:txBody>
+      </p:sp>
+      <p:sp>
+        <p:nvSpPr>
+          <p:cNvPr id="4" name="Slide Number Placeholder 3"/>
+          <p:cNvSpPr>
+            <a:spLocks noGrp="1"/>
+          </p:cNvSpPr>
+          <p:nvPr>
+            <p:ph type="sldNum" sz="quarter" idx="10"/>
+          </p:nvPr>
+        </p:nvSpPr>
+        <p:spPr/>
+        <p:txBody>
+          <a:bodyPr/>
+          <a:lstStyle/>
+          <a:p>
+            <a:fld id="{F7021451-1387-4CA6-816F-3879F97B5CBC}" type="slidenum">
+              <a:rPr lang="en-US"/>
+              <a:t>10</a:t>
+            </a:fld>
+            <a:endParaRPr lang="en-US"/>
+          </a:p>
+        </p:txBody>
+      </p:sp>
+    </p:spTree>
+    <p:extLst>
+      <p:ext uri="{BB962C8B-B14F-4D97-AF65-F5344CB8AC3E}">
+        <p14:creationId xmlns:p14="http://schemas.microsoft.com/office/powerpoint/2010/main" val="1024086991"/>
+      </p:ext>
+    </p:extLst>
+  </p:cSld>
+  <p:clrMapOvr>
+    <a:masterClrMapping/>
+  </p:clrMapOvr>
+</p:notes>
+</file>
+
+<file path=ppt/notesSlides/notesSlide11.xml><?xml version="1.0" encoding="utf-8"?>
+<p:notes xmlns:a="http://schemas.openxmlformats.org/drawingml/2006/main" xmlns:r="http://schemas.openxmlformats.org/officeDocument/2006/relationships" xmlns:p="http://schemas.openxmlformats.org/presentationml/2006/main">
+  <p:cSld>
+    <p:spTree>
+      <p:nvGrpSpPr>
+        <p:cNvPr id="1" name=""/>
+        <p:cNvGrpSpPr/>
+        <p:nvPr/>
+      </p:nvGrpSpPr>
+      <p:grpSpPr>
+        <a:xfrm>
+          <a:off x="0" y="0"/>
+          <a:ext cx="0" cy="0"/>
+          <a:chOff x="0" y="0"/>
+          <a:chExt cx="0" cy="0"/>
+        </a:xfrm>
+      </p:grpSpPr>
+      <p:sp>
+        <p:nvSpPr>
+          <p:cNvPr id="2" name="Slide Image Placeholder 1"/>
+          <p:cNvSpPr>
+            <a:spLocks noGrp="1" noRot="1" noChangeAspect="1"/>
+          </p:cNvSpPr>
+          <p:nvPr>
+            <p:ph type="sldImg"/>
+          </p:nvPr>
+        </p:nvSpPr>
+        <p:spPr/>
+      </p:sp>
+      <p:sp>
+        <p:nvSpPr>
+          <p:cNvPr id="3" name="Notes Placeholder 2"/>
+          <p:cNvSpPr>
+            <a:spLocks noGrp="1"/>
+          </p:cNvSpPr>
+          <p:nvPr>
+            <p:ph type="body" idx="1"/>
+          </p:nvPr>
+        </p:nvSpPr>
+        <p:spPr/>
+        <p:txBody>
+          <a:bodyPr/>
+          <a:lstStyle/>
+          <a:p>
+            <a:r>
+              <a:rPr lang="en-US" dirty="0"/>
+              <a:t>The comparison uses draw_kernel_spher_compare.m with ker_dir = {{sim.kernel_fx, sim.kernel_fy}, {sim.kernel_validate}} and the weights sin α and cos α taken from the pair line. For the old-code runs, SGT_STAZ was pointed to the fx output because the z weight is exactly zero for TT. The agreement of about 1e-11 is the double-precision round-off level, so the new code reproduces the old one for any azimuth.</a:t>
+            </a:r>
+            <a:endParaRPr lang="en-US" dirty="0"/>
+          </a:p>
+        </p:txBody>
+      </p:sp>
+      <p:sp>
+        <p:nvSpPr>
+          <p:cNvPr id="4" name="Slide Number Placeholder 3"/>
+          <p:cNvSpPr>
+            <a:spLocks noGrp="1"/>
+          </p:cNvSpPr>
+          <p:nvPr>
+            <p:ph type="sldNum" sz="quarter" idx="10"/>
+          </p:nvPr>
+        </p:nvSpPr>
+        <p:spPr/>
+        <p:txBody>
+          <a:bodyPr/>
+          <a:lstStyle/>
+          <a:p>
+            <a:fld id="{F7021451-1387-4CA6-816F-3879F97B5CBC}" type="slidenum">
+              <a:rPr lang="en-US"/>
+              <a:t>11</a:t>
+            </a:fld>
+            <a:endParaRPr lang="en-US"/>
+          </a:p>
+        </p:txBody>
+      </p:sp>
+    </p:spTree>
+    <p:extLst>
+      <p:ext uri="{BB962C8B-B14F-4D97-AF65-F5344CB8AC3E}">
+        <p14:creationId xmlns:p14="http://schemas.microsoft.com/office/powerpoint/2010/main" val="1024086991"/>
+      </p:ext>
+    </p:extLst>
+  </p:cSld>
+  <p:clrMapOvr>
+    <a:masterClrMapping/>
+  </p:clrMapOvr>
+</p:notes>
+</file>
+
 <file path=ppt/notesSlides/notesSlide2.xml><?xml version="1.0" encoding="utf-8"?>
 <p:notes xmlns:a="http://schemas.openxmlformats.org/drawingml/2006/main" xmlns:r="http://schemas.openxmlformats.org/officeDocument/2006/relationships" xmlns:p="http://schemas.openxmlformats.org/presentationml/2006/main">
   <p:cSld>
@@ -1149,6 +1335,94 @@
             <a:fld id="{F7021451-1387-4CA6-816F-3879F97B5CBC}" type="slidenum">
               <a:rPr lang="en-US"/>
               <a:t>8</a:t>
+            </a:fld>
+            <a:endParaRPr lang="en-US"/>
+          </a:p>
+        </p:txBody>
+      </p:sp>
+    </p:spTree>
+    <p:extLst>
+      <p:ext uri="{BB962C8B-B14F-4D97-AF65-F5344CB8AC3E}">
+        <p14:creationId xmlns:p14="http://schemas.microsoft.com/office/powerpoint/2010/main" val="1024086991"/>
+      </p:ext>
+    </p:extLst>
+  </p:cSld>
+  <p:clrMapOvr>
+    <a:masterClrMapping/>
+  </p:clrMapOvr>
+</p:notes>
+</file>
+
+<file path=ppt/notesSlides/notesSlide9.xml><?xml version="1.0" encoding="utf-8"?>
+<p:notes xmlns:a="http://schemas.openxmlformats.org/drawingml/2006/main" xmlns:r="http://schemas.openxmlformats.org/officeDocument/2006/relationships" xmlns:p="http://schemas.openxmlformats.org/presentationml/2006/main">
+  <p:cSld>
+    <p:spTree>
+      <p:nvGrpSpPr>
+        <p:cNvPr id="1" name=""/>
+        <p:cNvGrpSpPr/>
+        <p:nvPr/>
+      </p:nvGrpSpPr>
+      <p:grpSpPr>
+        <a:xfrm>
+          <a:off x="0" y="0"/>
+          <a:ext cx="0" cy="0"/>
+          <a:chOff x="0" y="0"/>
+          <a:chExt cx="0" cy="0"/>
+        </a:xfrm>
+      </p:grpSpPr>
+      <p:sp>
+        <p:nvSpPr>
+          <p:cNvPr id="2" name="Slide Image Placeholder 1"/>
+          <p:cNvSpPr>
+            <a:spLocks noGrp="1" noRot="1" noChangeAspect="1"/>
+          </p:cNvSpPr>
+          <p:nvPr>
+            <p:ph type="sldImg"/>
+          </p:nvPr>
+        </p:nvSpPr>
+        <p:spPr/>
+      </p:sp>
+      <p:sp>
+        <p:nvSpPr>
+          <p:cNvPr id="3" name="Notes Placeholder 2"/>
+          <p:cNvSpPr>
+            <a:spLocks noGrp="1"/>
+          </p:cNvSpPr>
+          <p:nvPr>
+            <p:ph type="body" idx="1"/>
+          </p:nvPr>
+        </p:nvSpPr>
+        <p:spPr/>
+        <p:txBody>
+          <a:bodyPr/>
+          <a:lstStyle/>
+          <a:p>
+            <a:r>
+              <a:rPr lang="en-US" dirty="0"/>
+              <a:t>The kernel is linear in the source run, so the new TT kernel must equal sin α times the old-code fx kernel plus cos α times the old-code fy kernel; that identity is the validation test on the later slide. KSTANM, from the station list, selects the SGT_ROOT runs (receiver side) and KEVNM, the first token of the pair line, selects the EVENT_ROOT runs. The assembly step reads only the kernel files in the pick-line folders and ignores the trailing weights.</a:t>
+            </a:r>
+            <a:endParaRPr lang="en-US" dirty="0"/>
+          </a:p>
+        </p:txBody>
+      </p:sp>
+      <p:sp>
+        <p:nvSpPr>
+          <p:cNvPr id="4" name="Slide Number Placeholder 3"/>
+          <p:cNvSpPr>
+            <a:spLocks noGrp="1"/>
+          </p:cNvSpPr>
+          <p:nvPr>
+            <p:ph type="sldNum" sz="quarter" idx="10"/>
+          </p:nvPr>
+        </p:nvSpPr>
+        <p:spPr/>
+        <p:txBody>
+          <a:bodyPr/>
+          <a:lstStyle/>
+          <a:p>
+            <a:fld id="{F7021451-1387-4CA6-816F-3879F97B5CBC}" type="slidenum">
+              <a:rPr lang="en-US"/>
+              <a:t>9</a:t>
             </a:fld>
             <a:endParaRPr lang="en-US"/>
           </a:p>
@@ -1298,7 +1572,7 @@
               <a:buNone/>
               <a:defRPr lang="en-US" sz="1600" dirty="0">
                 <a:solidFill>
-                  <a:srgbClr val="44505C"/>
+                  <a:srgbClr val="1D2B3A"/>
                 </a:solidFill>
                 <a:latin typeface="IBM Plex Sans" pitchFamily="34" charset="0"/>
                 <a:ea typeface="IBM Plex Sans" pitchFamily="34" charset="-122"/>
@@ -1426,7 +1700,7 @@
               <a:buNone/>
               <a:defRPr lang="en-US" sz="1600" dirty="0">
                 <a:solidFill>
-                  <a:srgbClr val="44505C"/>
+                  <a:srgbClr val="1D2B3A"/>
                 </a:solidFill>
                 <a:latin typeface="IBM Plex Sans" pitchFamily="34" charset="0"/>
                 <a:ea typeface="IBM Plex Sans" pitchFamily="34" charset="-122"/>
@@ -1872,6 +2146,1468 @@
 </p:sld>
 </file>
 
+<file path=ppt/slides/slide10.xml><?xml version="1.0" encoding="utf-8"?>
+<p:sld xmlns:a="http://schemas.openxmlformats.org/drawingml/2006/main" xmlns:r="http://schemas.openxmlformats.org/officeDocument/2006/relationships" xmlns:p="http://schemas.openxmlformats.org/presentationml/2006/main">
+  <p:cSld name="Slide 10">
+    <p:bg>
+      <p:bgPr>
+        <a:solidFill>
+          <a:srgbClr val="F6F4EE"/>
+        </a:solidFill>
+      </p:bgPr>
+    </p:bg>
+    <p:spTree>
+      <p:nvGrpSpPr>
+        <p:cNvPr id="1" name=""/>
+        <p:cNvGrpSpPr/>
+        <p:nvPr/>
+      </p:nvGrpSpPr>
+      <p:grpSpPr>
+        <a:xfrm>
+          <a:off x="0" y="0"/>
+          <a:ext cx="0" cy="0"/>
+          <a:chOff x="0" y="0"/>
+          <a:chExt cx="0" cy="0"/>
+        </a:xfrm>
+      </p:grpSpPr>
+      <p:sp>
+        <p:nvSpPr>
+          <p:cNvPr id="2" name="Text 0"/>
+          <p:cNvSpPr/>
+          <p:nvPr/>
+        </p:nvSpPr>
+        <p:spPr>
+          <a:xfrm>
+            <a:off x="812800" y="558800"/>
+            <a:ext cx="10883392" cy="238720"/>
+          </a:xfrm>
+          <a:prstGeom prst="rect">
+            <a:avLst/>
+          </a:prstGeom>
+          <a:noFill/>
+          <a:ln/>
+        </p:spPr>
+        <p:txBody>
+          <a:bodyPr wrap="square" lIns="0" tIns="0" rIns="0" bIns="0" rtlCol="0" anchor="t">
+            <a:normAutofit/>
+          </a:bodyPr>
+          <a:lstStyle/>
+          <a:p>
+            <a:pPr algn="l" indent="0" marL="0">
+              <a:lnSpc>
+                <a:spcPts val="1680"/>
+              </a:lnSpc>
+              <a:buNone/>
+            </a:pPr>
+            <a:r>
+              <a:rPr lang="en-US" sz="1200" b="1" spc="100" kern="0" dirty="0">
+                <a:solidFill>
+                  <a:srgbClr val="1F7A7A"/>
+                </a:solidFill>
+                <a:latin typeface="IBM Plex Sans" pitchFamily="34" charset="0"/>
+                <a:ea typeface="IBM Plex Sans" pitchFamily="34" charset="-122"/>
+                <a:cs typeface="IBM Plex Sans" pitchFamily="34" charset="-120"/>
+              </a:rPr>
+              <a:t>9 · COST</a:t>
+            </a:r>
+            <a:endParaRPr lang="en-US" sz="1200" dirty="0"/>
+          </a:p>
+        </p:txBody>
+      </p:sp>
+      <p:sp>
+        <p:nvSpPr>
+          <p:cNvPr id="3" name="Text 1"/>
+          <p:cNvSpPr/>
+          <p:nvPr>
+            <p:ph type="title"/>
+          </p:nvPr>
+        </p:nvSpPr>
+        <p:spPr>
+          <a:xfrm>
+            <a:off x="812800" y="949920"/>
+            <a:ext cx="10883392" cy="919460"/>
+          </a:xfrm>
+          <a:prstGeom prst="rect">
+            <a:avLst/>
+          </a:prstGeom>
+          <a:noFill/>
+          <a:ln/>
+        </p:spPr>
+        <p:txBody>
+          <a:bodyPr wrap="square" lIns="0" tIns="0" rIns="0" bIns="0" rtlCol="0" anchor="t">
+            <a:normAutofit/>
+          </a:bodyPr>
+          <a:lstStyle/>
+          <a:p>
+            <a:pPr algn="l" indent="0" marL="0">
+              <a:lnSpc>
+                <a:spcPts val="3520"/>
+              </a:lnSpc>
+              <a:buNone/>
+            </a:pPr>
+            <a:r>
+              <a:rPr lang="en-US" sz="3200" b="1" i="0" dirty="0">
+                <a:solidFill>
+                  <a:srgbClr val="1D2B3A"/>
+                </a:solidFill>
+                <a:latin typeface="EB Garamond" pitchFamily="18" charset="0"/>
+                <a:ea typeface="EB Garamond" pitchFamily="18" charset="-122"/>
+                <a:cs typeface="EB Garamond" pitchFamily="18" charset="-120"/>
+              </a:rPr>
+              <a:t>Slightly more memory, less CPU, and an FFT option still to come</a:t>
+            </a:r>
+            <a:endParaRPr lang="en-US" sz="3200" dirty="0"/>
+          </a:p>
+        </p:txBody>
+      </p:sp>
+      <p:sp>
+        <p:nvSpPr>
+          <p:cNvPr id="4" name="Shape 2"/>
+          <p:cNvSpPr/>
+          <p:nvPr/>
+        </p:nvSpPr>
+        <p:spPr>
+          <a:xfrm>
+            <a:off x="819150" y="2028130"/>
+            <a:ext cx="3238500" cy="2461171"/>
+          </a:xfrm>
+          <a:prstGeom prst="roundRect">
+            <a:avLst>
+              <a:gd name="adj" fmla="val 2838"/>
+            </a:avLst>
+          </a:prstGeom>
+          <a:solidFill>
+            <a:srgbClr val="FBFAF6"/>
+          </a:solidFill>
+          <a:ln w="12700">
+            <a:solidFill>
+              <a:srgbClr val="D9D4C7"/>
+            </a:solidFill>
+            <a:prstDash val="solid"/>
+          </a:ln>
+        </p:spPr>
+      </p:sp>
+      <p:sp>
+        <p:nvSpPr>
+          <p:cNvPr id="5" name="Text 3"/>
+          <p:cNvSpPr/>
+          <p:nvPr/>
+        </p:nvSpPr>
+        <p:spPr>
+          <a:xfrm>
+            <a:off x="1054100" y="2263080"/>
+            <a:ext cx="2851658" cy="665460"/>
+          </a:xfrm>
+          <a:prstGeom prst="rect">
+            <a:avLst/>
+          </a:prstGeom>
+          <a:noFill/>
+          <a:ln/>
+        </p:spPr>
+        <p:txBody>
+          <a:bodyPr wrap="square" lIns="0" tIns="0" rIns="0" bIns="0" rtlCol="0" anchor="t">
+            <a:normAutofit/>
+          </a:bodyPr>
+          <a:lstStyle/>
+          <a:p>
+            <a:pPr algn="l" indent="0" marL="0">
+              <a:lnSpc>
+                <a:spcPts val="5040"/>
+              </a:lnSpc>
+              <a:buNone/>
+            </a:pPr>
+            <a:r>
+              <a:rPr lang="en-US" sz="4800" b="1" dirty="0">
+                <a:solidFill>
+                  <a:srgbClr val="1F7A7A"/>
+                </a:solidFill>
+                <a:latin typeface="EB Garamond" pitchFamily="18" charset="0"/>
+                <a:ea typeface="EB Garamond" pitchFamily="18" charset="-122"/>
+                <a:cs typeface="EB Garamond" pitchFamily="18" charset="-120"/>
+              </a:rPr>
+              <a:t>+14%</a:t>
+            </a:r>
+            <a:endParaRPr lang="en-US" sz="4800" dirty="0"/>
+          </a:p>
+        </p:txBody>
+      </p:sp>
+      <p:sp>
+        <p:nvSpPr>
+          <p:cNvPr id="6" name="Text 4"/>
+          <p:cNvSpPr/>
+          <p:nvPr/>
+        </p:nvSpPr>
+        <p:spPr>
+          <a:xfrm>
+            <a:off x="1054100" y="2992041"/>
+            <a:ext cx="2851658" cy="274290"/>
+          </a:xfrm>
+          <a:prstGeom prst="rect">
+            <a:avLst/>
+          </a:prstGeom>
+          <a:noFill/>
+          <a:ln/>
+        </p:spPr>
+        <p:txBody>
+          <a:bodyPr wrap="square" lIns="0" tIns="0" rIns="0" bIns="0" rtlCol="0" anchor="t">
+            <a:normAutofit/>
+          </a:bodyPr>
+          <a:lstStyle/>
+          <a:p>
+            <a:pPr algn="l" indent="0" marL="0">
+              <a:lnSpc>
+                <a:spcPts val="1960"/>
+              </a:lnSpc>
+              <a:buNone/>
+            </a:pPr>
+            <a:r>
+              <a:rPr lang="en-US" sz="1400" b="1" dirty="0">
+                <a:solidFill>
+                  <a:srgbClr val="1D2B3A"/>
+                </a:solidFill>
+                <a:latin typeface="IBM Plex Sans" pitchFamily="34" charset="0"/>
+                <a:ea typeface="IBM Plex Sans" pitchFamily="34" charset="-122"/>
+                <a:cs typeface="IBM Plex Sans" pitchFamily="34" charset="-120"/>
+              </a:rPr>
+              <a:t>Memory (ZZ)</a:t>
+            </a:r>
+            <a:endParaRPr lang="en-US" sz="1400" dirty="0"/>
+          </a:p>
+        </p:txBody>
+      </p:sp>
+      <p:sp>
+        <p:nvSpPr>
+          <p:cNvPr id="7" name="Text 5"/>
+          <p:cNvSpPr/>
+          <p:nvPr/>
+        </p:nvSpPr>
+        <p:spPr>
+          <a:xfrm>
+            <a:off x="1054100" y="3329831"/>
+            <a:ext cx="2851658" cy="487660"/>
+          </a:xfrm>
+          <a:prstGeom prst="rect">
+            <a:avLst/>
+          </a:prstGeom>
+          <a:noFill/>
+          <a:ln/>
+        </p:spPr>
+        <p:txBody>
+          <a:bodyPr wrap="square" lIns="0" tIns="0" rIns="0" bIns="0" rtlCol="0" anchor="t">
+            <a:normAutofit/>
+          </a:bodyPr>
+          <a:lstStyle/>
+          <a:p>
+            <a:pPr algn="l" indent="0" marL="0">
+              <a:lnSpc>
+                <a:spcPts val="1820"/>
+              </a:lnSpc>
+              <a:buNone/>
+            </a:pPr>
+            <a:r>
+              <a:rPr lang="en-US" sz="1300" dirty="0">
+                <a:solidFill>
+                  <a:srgbClr val="44505C"/>
+                </a:solidFill>
+                <a:latin typeface="IBM Plex Sans" pitchFamily="34" charset="0"/>
+                <a:ea typeface="IBM Plex Sans" pitchFamily="34" charset="-122"/>
+                <a:cs typeface="IBM Plex Sans" pitchFamily="34" charset="-120"/>
+              </a:rPr>
+              <a:t>Two extra work arrays for the mixed event and receiver fields.</a:t>
+            </a:r>
+            <a:endParaRPr lang="en-US" sz="1300" dirty="0"/>
+          </a:p>
+        </p:txBody>
+      </p:sp>
+      <p:sp>
+        <p:nvSpPr>
+          <p:cNvPr id="8" name="Shape 6"/>
+          <p:cNvSpPr/>
+          <p:nvPr/>
+        </p:nvSpPr>
+        <p:spPr>
+          <a:xfrm>
+            <a:off x="4476750" y="2028130"/>
+            <a:ext cx="3238500" cy="2461171"/>
+          </a:xfrm>
+          <a:prstGeom prst="roundRect">
+            <a:avLst>
+              <a:gd name="adj" fmla="val 2838"/>
+            </a:avLst>
+          </a:prstGeom>
+          <a:solidFill>
+            <a:srgbClr val="FBFAF6"/>
+          </a:solidFill>
+          <a:ln w="12700">
+            <a:solidFill>
+              <a:srgbClr val="D9D4C7"/>
+            </a:solidFill>
+            <a:prstDash val="solid"/>
+          </a:ln>
+        </p:spPr>
+      </p:sp>
+      <p:sp>
+        <p:nvSpPr>
+          <p:cNvPr id="9" name="Text 7"/>
+          <p:cNvSpPr/>
+          <p:nvPr/>
+        </p:nvSpPr>
+        <p:spPr>
+          <a:xfrm>
+            <a:off x="4711700" y="2263080"/>
+            <a:ext cx="2851658" cy="665460"/>
+          </a:xfrm>
+          <a:prstGeom prst="rect">
+            <a:avLst/>
+          </a:prstGeom>
+          <a:noFill/>
+          <a:ln/>
+        </p:spPr>
+        <p:txBody>
+          <a:bodyPr wrap="square" lIns="0" tIns="0" rIns="0" bIns="0" rtlCol="0" anchor="t">
+            <a:normAutofit/>
+          </a:bodyPr>
+          <a:lstStyle/>
+          <a:p>
+            <a:pPr algn="l" indent="0" marL="0">
+              <a:lnSpc>
+                <a:spcPts val="5040"/>
+              </a:lnSpc>
+              <a:buNone/>
+            </a:pPr>
+            <a:r>
+              <a:rPr lang="en-US" sz="4800" b="1" dirty="0">
+                <a:solidFill>
+                  <a:srgbClr val="1F7A7A"/>
+                </a:solidFill>
+                <a:latin typeface="EB Garamond" pitchFamily="18" charset="0"/>
+                <a:ea typeface="EB Garamond" pitchFamily="18" charset="-122"/>
+                <a:cs typeface="EB Garamond" pitchFamily="18" charset="-120"/>
+              </a:rPr>
+              <a:t>Fewer</a:t>
+            </a:r>
+            <a:endParaRPr lang="en-US" sz="4800" dirty="0"/>
+          </a:p>
+        </p:txBody>
+      </p:sp>
+      <p:sp>
+        <p:nvSpPr>
+          <p:cNvPr id="10" name="Text 8"/>
+          <p:cNvSpPr/>
+          <p:nvPr/>
+        </p:nvSpPr>
+        <p:spPr>
+          <a:xfrm>
+            <a:off x="4711700" y="2992041"/>
+            <a:ext cx="2851658" cy="274290"/>
+          </a:xfrm>
+          <a:prstGeom prst="rect">
+            <a:avLst/>
+          </a:prstGeom>
+          <a:noFill/>
+          <a:ln/>
+        </p:spPr>
+        <p:txBody>
+          <a:bodyPr wrap="square" lIns="0" tIns="0" rIns="0" bIns="0" rtlCol="0" anchor="t">
+            <a:normAutofit/>
+          </a:bodyPr>
+          <a:lstStyle/>
+          <a:p>
+            <a:pPr algn="l" indent="0" marL="0">
+              <a:lnSpc>
+                <a:spcPts val="1960"/>
+              </a:lnSpc>
+              <a:buNone/>
+            </a:pPr>
+            <a:r>
+              <a:rPr lang="en-US" sz="1400" b="1" dirty="0">
+                <a:solidFill>
+                  <a:srgbClr val="1D2B3A"/>
+                </a:solidFill>
+                <a:latin typeface="IBM Plex Sans" pitchFamily="34" charset="0"/>
+                <a:ea typeface="IBM Plex Sans" pitchFamily="34" charset="-122"/>
+                <a:cs typeface="IBM Plex Sans" pitchFamily="34" charset="-120"/>
+              </a:rPr>
+              <a:t>CPU operations</a:t>
+            </a:r>
+            <a:endParaRPr lang="en-US" sz="1400" dirty="0"/>
+          </a:p>
+        </p:txBody>
+      </p:sp>
+      <p:sp>
+        <p:nvSpPr>
+          <p:cNvPr id="11" name="Text 9"/>
+          <p:cNvSpPr/>
+          <p:nvPr/>
+        </p:nvSpPr>
+        <p:spPr>
+          <a:xfrm>
+            <a:off x="4711700" y="3329831"/>
+            <a:ext cx="2851658" cy="949920"/>
+          </a:xfrm>
+          <a:prstGeom prst="rect">
+            <a:avLst/>
+          </a:prstGeom>
+          <a:noFill/>
+          <a:ln/>
+        </p:spPr>
+        <p:txBody>
+          <a:bodyPr wrap="square" lIns="0" tIns="0" rIns="0" bIns="0" rtlCol="0" anchor="t">
+            <a:normAutofit/>
+          </a:bodyPr>
+          <a:lstStyle/>
+          <a:p>
+            <a:pPr algn="l" indent="0" marL="0">
+              <a:lnSpc>
+                <a:spcPts val="1820"/>
+              </a:lnSpc>
+              <a:buNone/>
+            </a:pPr>
+            <a:r>
+              <a:rPr lang="en-US" sz="1300" dirty="0">
+                <a:solidFill>
+                  <a:srgbClr val="44505C"/>
+                </a:solidFill>
+                <a:latin typeface="IBM Plex Sans" pitchFamily="34" charset="0"/>
+                <a:ea typeface="IBM Plex Sans" pitchFamily="34" charset="-122"/>
+                <a:cs typeface="IBM Plex Sans" pitchFamily="34" charset="-120"/>
+              </a:rPr>
+              <a:t>Skipping the leading zeros of each SGT saves work that grows quadratically with the skipped length.</a:t>
+            </a:r>
+            <a:endParaRPr lang="en-US" sz="1300" dirty="0"/>
+          </a:p>
+        </p:txBody>
+      </p:sp>
+      <p:sp>
+        <p:nvSpPr>
+          <p:cNvPr id="12" name="Shape 10"/>
+          <p:cNvSpPr/>
+          <p:nvPr/>
+        </p:nvSpPr>
+        <p:spPr>
+          <a:xfrm>
+            <a:off x="8134350" y="2028130"/>
+            <a:ext cx="3238500" cy="2461171"/>
+          </a:xfrm>
+          <a:prstGeom prst="roundRect">
+            <a:avLst>
+              <a:gd name="adj" fmla="val 2838"/>
+            </a:avLst>
+          </a:prstGeom>
+          <a:solidFill>
+            <a:srgbClr val="FBFAF6"/>
+          </a:solidFill>
+          <a:ln w="12700">
+            <a:solidFill>
+              <a:srgbClr val="D9D4C7"/>
+            </a:solidFill>
+            <a:prstDash val="solid"/>
+          </a:ln>
+        </p:spPr>
+      </p:sp>
+      <p:sp>
+        <p:nvSpPr>
+          <p:cNvPr id="13" name="Text 11"/>
+          <p:cNvSpPr/>
+          <p:nvPr/>
+        </p:nvSpPr>
+        <p:spPr>
+          <a:xfrm>
+            <a:off x="8369300" y="2263080"/>
+            <a:ext cx="2851658" cy="665460"/>
+          </a:xfrm>
+          <a:prstGeom prst="rect">
+            <a:avLst/>
+          </a:prstGeom>
+          <a:noFill/>
+          <a:ln/>
+        </p:spPr>
+        <p:txBody>
+          <a:bodyPr wrap="square" lIns="0" tIns="0" rIns="0" bIns="0" rtlCol="0" anchor="t">
+            <a:normAutofit/>
+          </a:bodyPr>
+          <a:lstStyle/>
+          <a:p>
+            <a:pPr algn="l" indent="0" marL="0">
+              <a:lnSpc>
+                <a:spcPts val="5040"/>
+              </a:lnSpc>
+              <a:buNone/>
+            </a:pPr>
+            <a:r>
+              <a:rPr lang="en-US" sz="4800" b="1" dirty="0">
+                <a:solidFill>
+                  <a:srgbClr val="1F7A7A"/>
+                </a:solidFill>
+                <a:latin typeface="EB Garamond" pitchFamily="18" charset="0"/>
+                <a:ea typeface="EB Garamond" pitchFamily="18" charset="-122"/>
+                <a:cs typeface="EB Garamond" pitchFamily="18" charset="-120"/>
+              </a:rPr>
+              <a:t>~26×</a:t>
+            </a:r>
+            <a:endParaRPr lang="en-US" sz="4800" dirty="0"/>
+          </a:p>
+        </p:txBody>
+      </p:sp>
+      <p:sp>
+        <p:nvSpPr>
+          <p:cNvPr id="14" name="Text 12"/>
+          <p:cNvSpPr/>
+          <p:nvPr/>
+        </p:nvSpPr>
+        <p:spPr>
+          <a:xfrm>
+            <a:off x="8369300" y="2992041"/>
+            <a:ext cx="2851658" cy="274290"/>
+          </a:xfrm>
+          <a:prstGeom prst="rect">
+            <a:avLst/>
+          </a:prstGeom>
+          <a:noFill/>
+          <a:ln/>
+        </p:spPr>
+        <p:txBody>
+          <a:bodyPr wrap="square" lIns="0" tIns="0" rIns="0" bIns="0" rtlCol="0" anchor="t">
+            <a:normAutofit/>
+          </a:bodyPr>
+          <a:lstStyle/>
+          <a:p>
+            <a:pPr algn="l" indent="0" marL="0">
+              <a:lnSpc>
+                <a:spcPts val="1960"/>
+              </a:lnSpc>
+              <a:buNone/>
+            </a:pPr>
+            <a:r>
+              <a:rPr lang="en-US" sz="1400" b="1" dirty="0">
+                <a:solidFill>
+                  <a:srgbClr val="1D2B3A"/>
+                </a:solidFill>
+                <a:latin typeface="IBM Plex Sans" pitchFamily="34" charset="0"/>
+                <a:ea typeface="IBM Plex Sans" pitchFamily="34" charset="-122"/>
+                <a:cs typeface="IBM Plex Sans" pitchFamily="34" charset="-120"/>
+              </a:rPr>
+              <a:t>FFT convolution</a:t>
+            </a:r>
+            <a:endParaRPr lang="en-US" sz="1400" dirty="0"/>
+          </a:p>
+        </p:txBody>
+      </p:sp>
+      <p:sp>
+        <p:nvSpPr>
+          <p:cNvPr id="15" name="Text 13"/>
+          <p:cNvSpPr/>
+          <p:nvPr/>
+        </p:nvSpPr>
+        <p:spPr>
+          <a:xfrm>
+            <a:off x="8369300" y="3329831"/>
+            <a:ext cx="2851658" cy="487660"/>
+          </a:xfrm>
+          <a:prstGeom prst="rect">
+            <a:avLst/>
+          </a:prstGeom>
+          <a:noFill/>
+          <a:ln/>
+        </p:spPr>
+        <p:txBody>
+          <a:bodyPr wrap="square" lIns="0" tIns="0" rIns="0" bIns="0" rtlCol="0" anchor="t">
+            <a:normAutofit/>
+          </a:bodyPr>
+          <a:lstStyle/>
+          <a:p>
+            <a:pPr algn="l" indent="0" marL="0">
+              <a:lnSpc>
+                <a:spcPts val="1820"/>
+              </a:lnSpc>
+              <a:buNone/>
+            </a:pPr>
+            <a:r>
+              <a:rPr lang="en-US" sz="1300" dirty="0">
+                <a:solidFill>
+                  <a:srgbClr val="44505C"/>
+                </a:solidFill>
+                <a:latin typeface="IBM Plex Sans" pitchFamily="34" charset="0"/>
+                <a:ea typeface="IBM Plex Sans" pitchFamily="34" charset="-122"/>
+                <a:cs typeface="IBM Plex Sans" pitchFamily="34" charset="-120"/>
+              </a:rPr>
+              <a:t>Student's module in a test, matching the direct sum to about 4e-16.</a:t>
+            </a:r>
+            <a:endParaRPr lang="en-US" sz="1300" dirty="0"/>
+          </a:p>
+        </p:txBody>
+      </p:sp>
+      <p:sp>
+        <p:nvSpPr>
+          <p:cNvPr id="16" name="Shape 14"/>
+          <p:cNvSpPr/>
+          <p:nvPr/>
+        </p:nvSpPr>
+        <p:spPr>
+          <a:xfrm>
+            <a:off x="812800" y="4673451"/>
+            <a:ext cx="10566400" cy="835620"/>
+          </a:xfrm>
+          <a:prstGeom prst="roundRect">
+            <a:avLst>
+              <a:gd name="adj" fmla="val 9119"/>
+            </a:avLst>
+          </a:prstGeom>
+          <a:solidFill>
+            <a:srgbClr val="1D2B3A"/>
+          </a:solidFill>
+          <a:ln/>
+        </p:spPr>
+      </p:sp>
+      <p:sp>
+        <p:nvSpPr>
+          <p:cNvPr id="17" name="Text 15"/>
+          <p:cNvSpPr/>
+          <p:nvPr/>
+        </p:nvSpPr>
+        <p:spPr>
+          <a:xfrm>
+            <a:off x="1041400" y="4962674"/>
+            <a:ext cx="1962150" cy="282575"/>
+          </a:xfrm>
+          <a:prstGeom prst="rect">
+            <a:avLst/>
+          </a:prstGeom>
+          <a:noFill/>
+          <a:ln/>
+        </p:spPr>
+        <p:txBody>
+          <a:bodyPr wrap="square" lIns="0" tIns="0" rIns="0" bIns="0" rtlCol="0" anchor="t">
+            <a:normAutofit/>
+          </a:bodyPr>
+          <a:lstStyle/>
+          <a:p>
+            <a:pPr algn="l" indent="0" marL="0">
+              <a:lnSpc>
+                <a:spcPts val="2025"/>
+              </a:lnSpc>
+              <a:buNone/>
+            </a:pPr>
+            <a:r>
+              <a:rPr lang="en-US" sz="1500" b="1" dirty="0">
+                <a:solidFill>
+                  <a:srgbClr val="F6F4EE"/>
+                </a:solidFill>
+                <a:latin typeface="IBM Plex Sans" pitchFamily="34" charset="0"/>
+                <a:ea typeface="IBM Plex Sans" pitchFamily="34" charset="-122"/>
+                <a:cs typeface="IBM Plex Sans" pitchFamily="34" charset="-120"/>
+              </a:rPr>
+              <a:t>Build notes</a:t>
+            </a:r>
+            <a:endParaRPr lang="en-US" sz="1500" dirty="0"/>
+          </a:p>
+        </p:txBody>
+      </p:sp>
+      <p:sp>
+        <p:nvSpPr>
+          <p:cNvPr id="18" name="Text 16"/>
+          <p:cNvSpPr/>
+          <p:nvPr/>
+        </p:nvSpPr>
+        <p:spPr>
+          <a:xfrm>
+            <a:off x="3098800" y="4851251"/>
+            <a:ext cx="8293354" cy="505420"/>
+          </a:xfrm>
+          <a:prstGeom prst="rect">
+            <a:avLst/>
+          </a:prstGeom>
+          <a:noFill/>
+          <a:ln/>
+        </p:spPr>
+        <p:txBody>
+          <a:bodyPr wrap="square" lIns="0" tIns="0" rIns="0" bIns="0" rtlCol="0" anchor="t">
+            <a:normAutofit/>
+          </a:bodyPr>
+          <a:lstStyle/>
+          <a:p>
+            <a:pPr algn="l" indent="0" marL="0">
+              <a:lnSpc>
+                <a:spcPts val="1890"/>
+              </a:lnSpc>
+              <a:buNone/>
+            </a:pPr>
+            <a:r>
+              <a:rPr lang="en-US" sz="1400" dirty="0">
+                <a:solidFill>
+                  <a:srgbClr val="D5E0E7"/>
+                </a:solidFill>
+                <a:latin typeface="IBM Plex Sans" pitchFamily="34" charset="0"/>
+                <a:ea typeface="IBM Plex Sans" pitchFamily="34" charset="-122"/>
+                <a:cs typeface="IBM Plex Sans" pitchFamily="34" charset="-120"/>
+              </a:rPr>
+              <a:t>Use the double-precision build only: the existing "SP" builds are already double because of a Makefile flag. OpenMP is used only when compiled with OMP=1.</a:t>
+            </a:r>
+            <a:endParaRPr lang="en-US" sz="1400" dirty="0"/>
+          </a:p>
+        </p:txBody>
+      </p:sp>
+    </p:spTree>
+  </p:cSld>
+  <p:clrMapOvr>
+    <a:masterClrMapping/>
+  </p:clrMapOvr>
+</p:sld>
+</file>
+
+<file path=ppt/slides/slide11.xml><?xml version="1.0" encoding="utf-8"?>
+<p:sld xmlns:a="http://schemas.openxmlformats.org/drawingml/2006/main" xmlns:r="http://schemas.openxmlformats.org/officeDocument/2006/relationships" xmlns:p="http://schemas.openxmlformats.org/presentationml/2006/main">
+  <p:cSld name="Slide 11">
+    <p:bg>
+      <p:bgPr>
+        <a:solidFill>
+          <a:srgbClr val="F6F4EE"/>
+        </a:solidFill>
+      </p:bgPr>
+    </p:bg>
+    <p:spTree>
+      <p:nvGrpSpPr>
+        <p:cNvPr id="1" name=""/>
+        <p:cNvGrpSpPr/>
+        <p:nvPr/>
+      </p:nvGrpSpPr>
+      <p:grpSpPr>
+        <a:xfrm>
+          <a:off x="0" y="0"/>
+          <a:ext cx="0" cy="0"/>
+          <a:chOff x="0" y="0"/>
+          <a:chExt cx="0" cy="0"/>
+        </a:xfrm>
+      </p:grpSpPr>
+      <p:sp>
+        <p:nvSpPr>
+          <p:cNvPr id="2" name="Text 0"/>
+          <p:cNvSpPr/>
+          <p:nvPr/>
+        </p:nvSpPr>
+        <p:spPr>
+          <a:xfrm>
+            <a:off x="812800" y="558800"/>
+            <a:ext cx="10883392" cy="238720"/>
+          </a:xfrm>
+          <a:prstGeom prst="rect">
+            <a:avLst/>
+          </a:prstGeom>
+          <a:noFill/>
+          <a:ln/>
+        </p:spPr>
+        <p:txBody>
+          <a:bodyPr wrap="square" lIns="0" tIns="0" rIns="0" bIns="0" rtlCol="0" anchor="t">
+            <a:normAutofit/>
+          </a:bodyPr>
+          <a:lstStyle/>
+          <a:p>
+            <a:pPr algn="l" indent="0" marL="0">
+              <a:lnSpc>
+                <a:spcPts val="1680"/>
+              </a:lnSpc>
+              <a:buNone/>
+            </a:pPr>
+            <a:r>
+              <a:rPr lang="en-US" sz="1200" b="1" spc="100" kern="0" dirty="0">
+                <a:solidFill>
+                  <a:srgbClr val="1F7A7A"/>
+                </a:solidFill>
+                <a:latin typeface="IBM Plex Sans" pitchFamily="34" charset="0"/>
+                <a:ea typeface="IBM Plex Sans" pitchFamily="34" charset="-122"/>
+                <a:cs typeface="IBM Plex Sans" pitchFamily="34" charset="-120"/>
+              </a:rPr>
+              <a:t>10 · VALIDATION</a:t>
+            </a:r>
+            <a:endParaRPr lang="en-US" sz="1200" dirty="0"/>
+          </a:p>
+        </p:txBody>
+      </p:sp>
+      <p:sp>
+        <p:nvSpPr>
+          <p:cNvPr id="3" name="Text 1"/>
+          <p:cNvSpPr/>
+          <p:nvPr>
+            <p:ph type="title"/>
+          </p:nvPr>
+        </p:nvSpPr>
+        <p:spPr>
+          <a:xfrm>
+            <a:off x="812800" y="949920"/>
+            <a:ext cx="11379200" cy="472430"/>
+          </a:xfrm>
+          <a:prstGeom prst="rect">
+            <a:avLst/>
+          </a:prstGeom>
+          <a:noFill/>
+          <a:ln/>
+        </p:spPr>
+        <p:txBody>
+          <a:bodyPr wrap="square" lIns="0" tIns="0" rIns="0" bIns="0" rtlCol="0" anchor="t">
+            <a:normAutofit/>
+          </a:bodyPr>
+          <a:lstStyle/>
+          <a:p>
+            <a:pPr algn="l" indent="0" marL="0">
+              <a:lnSpc>
+                <a:spcPts val="3520"/>
+              </a:lnSpc>
+              <a:buNone/>
+            </a:pPr>
+            <a:r>
+              <a:rPr lang="en-US" sz="3200" b="1" i="0" dirty="0">
+                <a:solidFill>
+                  <a:srgbClr val="1D2B3A"/>
+                </a:solidFill>
+                <a:latin typeface="EB Garamond" pitchFamily="18" charset="0"/>
+                <a:ea typeface="EB Garamond" pitchFamily="18" charset="-122"/>
+                <a:cs typeface="EB Garamond" pitchFamily="18" charset="-120"/>
+              </a:rPr>
+              <a:t>New TT kernel = sin α · K(fx) + cos α · K(fy) from the old code</a:t>
+            </a:r>
+            <a:endParaRPr lang="en-US" sz="3200" dirty="0"/>
+          </a:p>
+        </p:txBody>
+      </p:sp>
+      <p:sp>
+        <p:nvSpPr>
+          <p:cNvPr id="4" name="Text 2"/>
+          <p:cNvSpPr/>
+          <p:nvPr/>
+        </p:nvSpPr>
+        <p:spPr>
+          <a:xfrm>
+            <a:off x="812800" y="1574750"/>
+            <a:ext cx="10883392" cy="558800"/>
+          </a:xfrm>
+          <a:prstGeom prst="rect">
+            <a:avLst/>
+          </a:prstGeom>
+          <a:noFill/>
+          <a:ln/>
+        </p:spPr>
+        <p:txBody>
+          <a:bodyPr wrap="square" lIns="0" tIns="0" rIns="0" bIns="0" rtlCol="0" anchor="t">
+            <a:normAutofit/>
+          </a:bodyPr>
+          <a:lstStyle/>
+          <a:p>
+            <a:pPr algn="l" indent="0" marL="0">
+              <a:lnSpc>
+                <a:spcPts val="2100"/>
+              </a:lnSpc>
+              <a:buNone/>
+            </a:pPr>
+            <a:r>
+              <a:rPr lang="en-US" sz="1500" dirty="0">
+                <a:solidFill>
+                  <a:srgbClr val="44505C"/>
+                </a:solidFill>
+                <a:latin typeface="IBM Plex Sans" pitchFamily="34" charset="0"/>
+                <a:ea typeface="IBM Plex Sans" pitchFamily="34" charset="-122"/>
+                <a:cs typeface="IBM Plex Sans" pitchFamily="34" charset="-120"/>
+              </a:rPr>
+              <a:t>The old code cannot mix source runs, but it is linear in the source run: run it on the fx and fy event folders, combine with the pair's weights, and compare with one run of the new code.</a:t>
+            </a:r>
+            <a:endParaRPr lang="en-US" sz="1500" dirty="0"/>
+          </a:p>
+        </p:txBody>
+      </p:sp>
+      <p:sp>
+        <p:nvSpPr>
+          <p:cNvPr id="5" name="Shape 3"/>
+          <p:cNvSpPr/>
+          <p:nvPr/>
+        </p:nvSpPr>
+        <p:spPr>
+          <a:xfrm>
+            <a:off x="819150" y="2292300"/>
+            <a:ext cx="3238500" cy="2230041"/>
+          </a:xfrm>
+          <a:prstGeom prst="roundRect">
+            <a:avLst>
+              <a:gd name="adj" fmla="val 3132"/>
+            </a:avLst>
+          </a:prstGeom>
+          <a:solidFill>
+            <a:srgbClr val="FBFAF6"/>
+          </a:solidFill>
+          <a:ln w="12700">
+            <a:solidFill>
+              <a:srgbClr val="D9D4C7"/>
+            </a:solidFill>
+            <a:prstDash val="solid"/>
+          </a:ln>
+        </p:spPr>
+      </p:sp>
+      <p:sp>
+        <p:nvSpPr>
+          <p:cNvPr id="6" name="Text 4"/>
+          <p:cNvSpPr/>
+          <p:nvPr/>
+        </p:nvSpPr>
+        <p:spPr>
+          <a:xfrm>
+            <a:off x="1054100" y="2527250"/>
+            <a:ext cx="2851658" cy="665460"/>
+          </a:xfrm>
+          <a:prstGeom prst="rect">
+            <a:avLst/>
+          </a:prstGeom>
+          <a:noFill/>
+          <a:ln/>
+        </p:spPr>
+        <p:txBody>
+          <a:bodyPr wrap="square" lIns="0" tIns="0" rIns="0" bIns="0" rtlCol="0" anchor="t">
+            <a:normAutofit/>
+          </a:bodyPr>
+          <a:lstStyle/>
+          <a:p>
+            <a:pPr algn="l" indent="0" marL="0">
+              <a:lnSpc>
+                <a:spcPts val="5040"/>
+              </a:lnSpc>
+              <a:buNone/>
+            </a:pPr>
+            <a:r>
+              <a:rPr lang="en-US" sz="4800" b="1" dirty="0">
+                <a:solidFill>
+                  <a:srgbClr val="1F7A7A"/>
+                </a:solidFill>
+                <a:latin typeface="EB Garamond" pitchFamily="18" charset="0"/>
+                <a:ea typeface="EB Garamond" pitchFamily="18" charset="-122"/>
+                <a:cs typeface="EB Garamond" pitchFamily="18" charset="-120"/>
+              </a:rPr>
+              <a:t>~2e-11</a:t>
+            </a:r>
+            <a:endParaRPr lang="en-US" sz="4800" dirty="0"/>
+          </a:p>
+        </p:txBody>
+      </p:sp>
+      <p:sp>
+        <p:nvSpPr>
+          <p:cNvPr id="7" name="Text 5"/>
+          <p:cNvSpPr/>
+          <p:nvPr/>
+        </p:nvSpPr>
+        <p:spPr>
+          <a:xfrm>
+            <a:off x="1054100" y="3256211"/>
+            <a:ext cx="2851658" cy="274290"/>
+          </a:xfrm>
+          <a:prstGeom prst="rect">
+            <a:avLst/>
+          </a:prstGeom>
+          <a:noFill/>
+          <a:ln/>
+        </p:spPr>
+        <p:txBody>
+          <a:bodyPr wrap="square" lIns="0" tIns="0" rIns="0" bIns="0" rtlCol="0" anchor="t">
+            <a:normAutofit/>
+          </a:bodyPr>
+          <a:lstStyle/>
+          <a:p>
+            <a:pPr algn="l" indent="0" marL="0">
+              <a:lnSpc>
+                <a:spcPts val="1960"/>
+              </a:lnSpc>
+              <a:buNone/>
+            </a:pPr>
+            <a:r>
+              <a:rPr lang="en-US" sz="1400" b="1" dirty="0">
+                <a:solidFill>
+                  <a:srgbClr val="1D2B3A"/>
+                </a:solidFill>
+                <a:latin typeface="IBM Plex Sans" pitchFamily="34" charset="0"/>
+                <a:ea typeface="IBM Plex Sans" pitchFamily="34" charset="-122"/>
+                <a:cs typeface="IBM Plex Sans" pitchFamily="34" charset="-120"/>
+              </a:rPr>
+              <a:t>Relative difference</a:t>
+            </a:r>
+            <a:endParaRPr lang="en-US" sz="1400" dirty="0"/>
+          </a:p>
+        </p:txBody>
+      </p:sp>
+      <p:sp>
+        <p:nvSpPr>
+          <p:cNvPr id="8" name="Text 6"/>
+          <p:cNvSpPr/>
+          <p:nvPr/>
+        </p:nvSpPr>
+        <p:spPr>
+          <a:xfrm>
+            <a:off x="1054100" y="3594001"/>
+            <a:ext cx="2851658" cy="718790"/>
+          </a:xfrm>
+          <a:prstGeom prst="rect">
+            <a:avLst/>
+          </a:prstGeom>
+          <a:noFill/>
+          <a:ln/>
+        </p:spPr>
+        <p:txBody>
+          <a:bodyPr wrap="square" lIns="0" tIns="0" rIns="0" bIns="0" rtlCol="0" anchor="t">
+            <a:normAutofit/>
+          </a:bodyPr>
+          <a:lstStyle/>
+          <a:p>
+            <a:pPr algn="l" indent="0" marL="0">
+              <a:lnSpc>
+                <a:spcPts val="1820"/>
+              </a:lnSpc>
+              <a:buNone/>
+            </a:pPr>
+            <a:r>
+              <a:rPr lang="en-US" sz="1300" dirty="0">
+                <a:solidFill>
+                  <a:srgbClr val="44505C"/>
+                </a:solidFill>
+                <a:latin typeface="IBM Plex Sans" pitchFamily="34" charset="0"/>
+                <a:ea typeface="IBM Plex Sans" pitchFamily="34" charset="-122"/>
+                <a:cs typeface="IBM Plex Sans" pitchFamily="34" charset="-120"/>
+              </a:rPr>
+              <a:t>max|new − old| over max|old|: 1.9e-11 for phase_Vp, 2.5e-11 for phase_Vs.</a:t>
+            </a:r>
+            <a:endParaRPr lang="en-US" sz="1300" dirty="0"/>
+          </a:p>
+        </p:txBody>
+      </p:sp>
+      <p:sp>
+        <p:nvSpPr>
+          <p:cNvPr id="9" name="Shape 7"/>
+          <p:cNvSpPr/>
+          <p:nvPr/>
+        </p:nvSpPr>
+        <p:spPr>
+          <a:xfrm>
+            <a:off x="4476750" y="2292300"/>
+            <a:ext cx="3238500" cy="2230041"/>
+          </a:xfrm>
+          <a:prstGeom prst="roundRect">
+            <a:avLst>
+              <a:gd name="adj" fmla="val 3132"/>
+            </a:avLst>
+          </a:prstGeom>
+          <a:solidFill>
+            <a:srgbClr val="FBFAF6"/>
+          </a:solidFill>
+          <a:ln w="12700">
+            <a:solidFill>
+              <a:srgbClr val="D9D4C7"/>
+            </a:solidFill>
+            <a:prstDash val="solid"/>
+          </a:ln>
+        </p:spPr>
+      </p:sp>
+      <p:sp>
+        <p:nvSpPr>
+          <p:cNvPr id="10" name="Text 8"/>
+          <p:cNvSpPr/>
+          <p:nvPr/>
+        </p:nvSpPr>
+        <p:spPr>
+          <a:xfrm>
+            <a:off x="4711700" y="2527250"/>
+            <a:ext cx="2851658" cy="665460"/>
+          </a:xfrm>
+          <a:prstGeom prst="rect">
+            <a:avLst/>
+          </a:prstGeom>
+          <a:noFill/>
+          <a:ln/>
+        </p:spPr>
+        <p:txBody>
+          <a:bodyPr wrap="square" lIns="0" tIns="0" rIns="0" bIns="0" rtlCol="0" anchor="t">
+            <a:normAutofit/>
+          </a:bodyPr>
+          <a:lstStyle/>
+          <a:p>
+            <a:pPr algn="l" indent="0" marL="0">
+              <a:lnSpc>
+                <a:spcPts val="5040"/>
+              </a:lnSpc>
+              <a:buNone/>
+            </a:pPr>
+            <a:r>
+              <a:rPr lang="en-US" sz="4800" b="1" dirty="0">
+                <a:solidFill>
+                  <a:srgbClr val="1F7A7A"/>
+                </a:solidFill>
+                <a:latin typeface="EB Garamond" pitchFamily="18" charset="0"/>
+                <a:ea typeface="EB Garamond" pitchFamily="18" charset="-122"/>
+                <a:cs typeface="EB Garamond" pitchFamily="18" charset="-120"/>
+              </a:rPr>
+              <a:t>± cos α</a:t>
+            </a:r>
+            <a:endParaRPr lang="en-US" sz="4800" dirty="0"/>
+          </a:p>
+        </p:txBody>
+      </p:sp>
+      <p:sp>
+        <p:nvSpPr>
+          <p:cNvPr id="11" name="Text 9"/>
+          <p:cNvSpPr/>
+          <p:nvPr/>
+        </p:nvSpPr>
+        <p:spPr>
+          <a:xfrm>
+            <a:off x="4711700" y="3256211"/>
+            <a:ext cx="2851658" cy="274290"/>
+          </a:xfrm>
+          <a:prstGeom prst="rect">
+            <a:avLst/>
+          </a:prstGeom>
+          <a:noFill/>
+          <a:ln/>
+        </p:spPr>
+        <p:txBody>
+          <a:bodyPr wrap="square" lIns="0" tIns="0" rIns="0" bIns="0" rtlCol="0" anchor="t">
+            <a:normAutofit/>
+          </a:bodyPr>
+          <a:lstStyle/>
+          <a:p>
+            <a:pPr algn="l" indent="0" marL="0">
+              <a:lnSpc>
+                <a:spcPts val="1960"/>
+              </a:lnSpc>
+              <a:buNone/>
+            </a:pPr>
+            <a:r>
+              <a:rPr lang="en-US" sz="1400" b="1" dirty="0">
+                <a:solidFill>
+                  <a:srgbClr val="1D2B3A"/>
+                </a:solidFill>
+                <a:latin typeface="IBM Plex Sans" pitchFamily="34" charset="0"/>
+                <a:ea typeface="IBM Plex Sans" pitchFamily="34" charset="-122"/>
+                <a:cs typeface="IBM Plex Sans" pitchFamily="34" charset="-120"/>
+              </a:rPr>
+              <a:t>Pairs and depths</a:t>
+            </a:r>
+            <a:endParaRPr lang="en-US" sz="1400" dirty="0"/>
+          </a:p>
+        </p:txBody>
+      </p:sp>
+      <p:sp>
+        <p:nvSpPr>
+          <p:cNvPr id="12" name="Text 10"/>
+          <p:cNvSpPr/>
+          <p:nvPr/>
+        </p:nvSpPr>
+        <p:spPr>
+          <a:xfrm>
+            <a:off x="4711700" y="3594001"/>
+            <a:ext cx="2851658" cy="718790"/>
+          </a:xfrm>
+          <a:prstGeom prst="rect">
+            <a:avLst/>
+          </a:prstGeom>
+          <a:noFill/>
+          <a:ln/>
+        </p:spPr>
+        <p:txBody>
+          <a:bodyPr wrap="square" lIns="0" tIns="0" rIns="0" bIns="0" rtlCol="0" anchor="t">
+            <a:normAutofit/>
+          </a:bodyPr>
+          <a:lstStyle/>
+          <a:p>
+            <a:pPr algn="l" indent="0" marL="0">
+              <a:lnSpc>
+                <a:spcPts val="1820"/>
+              </a:lnSpc>
+              <a:buNone/>
+            </a:pPr>
+            <a:r>
+              <a:rPr lang="en-US" sz="1300" dirty="0">
+                <a:solidFill>
+                  <a:srgbClr val="44505C"/>
+                </a:solidFill>
+                <a:latin typeface="IBM Plex Sans" pitchFamily="34" charset="0"/>
+                <a:ea typeface="IBM Plex Sans" pitchFamily="34" charset="-122"/>
+                <a:cs typeface="IBM Plex Sans" pitchFamily="34" charset="-120"/>
+              </a:rPr>
+              <a:t>Two pairs, one with a negative cos α, and several depths: identical to the same level.</a:t>
+            </a:r>
+            <a:endParaRPr lang="en-US" sz="1300" dirty="0"/>
+          </a:p>
+        </p:txBody>
+      </p:sp>
+      <p:sp>
+        <p:nvSpPr>
+          <p:cNvPr id="13" name="Shape 11"/>
+          <p:cNvSpPr/>
+          <p:nvPr/>
+        </p:nvSpPr>
+        <p:spPr>
+          <a:xfrm>
+            <a:off x="8134350" y="2292300"/>
+            <a:ext cx="3238500" cy="2230041"/>
+          </a:xfrm>
+          <a:prstGeom prst="roundRect">
+            <a:avLst>
+              <a:gd name="adj" fmla="val 3132"/>
+            </a:avLst>
+          </a:prstGeom>
+          <a:solidFill>
+            <a:srgbClr val="FBFAF6"/>
+          </a:solidFill>
+          <a:ln w="12700">
+            <a:solidFill>
+              <a:srgbClr val="D9D4C7"/>
+            </a:solidFill>
+            <a:prstDash val="solid"/>
+          </a:ln>
+        </p:spPr>
+      </p:sp>
+      <p:sp>
+        <p:nvSpPr>
+          <p:cNvPr id="14" name="Text 12"/>
+          <p:cNvSpPr/>
+          <p:nvPr/>
+        </p:nvSpPr>
+        <p:spPr>
+          <a:xfrm>
+            <a:off x="8369300" y="2527250"/>
+            <a:ext cx="2851658" cy="665460"/>
+          </a:xfrm>
+          <a:prstGeom prst="rect">
+            <a:avLst/>
+          </a:prstGeom>
+          <a:noFill/>
+          <a:ln/>
+        </p:spPr>
+        <p:txBody>
+          <a:bodyPr wrap="square" lIns="0" tIns="0" rIns="0" bIns="0" rtlCol="0" anchor="t">
+            <a:normAutofit/>
+          </a:bodyPr>
+          <a:lstStyle/>
+          <a:p>
+            <a:pPr algn="l" indent="0" marL="0">
+              <a:lnSpc>
+                <a:spcPts val="5040"/>
+              </a:lnSpc>
+              <a:buNone/>
+            </a:pPr>
+            <a:r>
+              <a:rPr lang="en-US" sz="4800" b="1" dirty="0">
+                <a:solidFill>
+                  <a:srgbClr val="1F7A7A"/>
+                </a:solidFill>
+                <a:latin typeface="EB Garamond" pitchFamily="18" charset="0"/>
+                <a:ea typeface="EB Garamond" pitchFamily="18" charset="-122"/>
+                <a:cs typeface="EB Garamond" pitchFamily="18" charset="-120"/>
+              </a:rPr>
+              <a:t>Same sign</a:t>
+            </a:r>
+            <a:endParaRPr lang="en-US" sz="4800" dirty="0"/>
+          </a:p>
+        </p:txBody>
+      </p:sp>
+      <p:sp>
+        <p:nvSpPr>
+          <p:cNvPr id="15" name="Text 13"/>
+          <p:cNvSpPr/>
+          <p:nvPr/>
+        </p:nvSpPr>
+        <p:spPr>
+          <a:xfrm>
+            <a:off x="8369300" y="3256211"/>
+            <a:ext cx="2851658" cy="274290"/>
+          </a:xfrm>
+          <a:prstGeom prst="rect">
+            <a:avLst/>
+          </a:prstGeom>
+          <a:noFill/>
+          <a:ln/>
+        </p:spPr>
+        <p:txBody>
+          <a:bodyPr wrap="square" lIns="0" tIns="0" rIns="0" bIns="0" rtlCol="0" anchor="t">
+            <a:normAutofit/>
+          </a:bodyPr>
+          <a:lstStyle/>
+          <a:p>
+            <a:pPr algn="l" indent="0" marL="0">
+              <a:lnSpc>
+                <a:spcPts val="1960"/>
+              </a:lnSpc>
+              <a:buNone/>
+            </a:pPr>
+            <a:r>
+              <a:rPr lang="en-US" sz="1400" b="1" dirty="0">
+                <a:solidFill>
+                  <a:srgbClr val="1D2B3A"/>
+                </a:solidFill>
+                <a:latin typeface="IBM Plex Sans" pitchFamily="34" charset="0"/>
+                <a:ea typeface="IBM Plex Sans" pitchFamily="34" charset="-122"/>
+                <a:cs typeface="IBM Plex Sans" pitchFamily="34" charset="-120"/>
+              </a:rPr>
+              <a:t>As the ZZ kernels</a:t>
+            </a:r>
+            <a:endParaRPr lang="en-US" sz="1400" dirty="0"/>
+          </a:p>
+        </p:txBody>
+      </p:sp>
+      <p:sp>
+        <p:nvSpPr>
+          <p:cNvPr id="16" name="Text 14"/>
+          <p:cNvSpPr/>
+          <p:nvPr/>
+        </p:nvSpPr>
+        <p:spPr>
+          <a:xfrm>
+            <a:off x="8369300" y="3594001"/>
+            <a:ext cx="2851658" cy="718790"/>
+          </a:xfrm>
+          <a:prstGeom prst="rect">
+            <a:avLst/>
+          </a:prstGeom>
+          <a:noFill/>
+          <a:ln/>
+        </p:spPr>
+        <p:txBody>
+          <a:bodyPr wrap="square" lIns="0" tIns="0" rIns="0" bIns="0" rtlCol="0" anchor="t">
+            <a:normAutofit/>
+          </a:bodyPr>
+          <a:lstStyle/>
+          <a:p>
+            <a:pPr algn="l" indent="0" marL="0">
+              <a:lnSpc>
+                <a:spcPts val="1820"/>
+              </a:lnSpc>
+              <a:buNone/>
+            </a:pPr>
+            <a:r>
+              <a:rPr lang="en-US" sz="1300" dirty="0">
+                <a:solidFill>
+                  <a:srgbClr val="44505C"/>
+                </a:solidFill>
+                <a:latin typeface="IBM Plex Sans" pitchFamily="34" charset="0"/>
+                <a:ea typeface="IBM Plex Sans" pitchFamily="34" charset="-122"/>
+                <a:cs typeface="IBM Plex Sans" pitchFamily="34" charset="-120"/>
+              </a:rPr>
+              <a:t>Kernels are mostly negative along the path, as for ZZ; phase-delay polarity matches the waveforms.</a:t>
+            </a:r>
+            <a:endParaRPr lang="en-US" sz="1300" dirty="0"/>
+          </a:p>
+        </p:txBody>
+      </p:sp>
+      <p:sp>
+        <p:nvSpPr>
+          <p:cNvPr id="17" name="Shape 15"/>
+          <p:cNvSpPr/>
+          <p:nvPr/>
+        </p:nvSpPr>
+        <p:spPr>
+          <a:xfrm>
+            <a:off x="812800" y="4706491"/>
+            <a:ext cx="10566400" cy="835620"/>
+          </a:xfrm>
+          <a:prstGeom prst="roundRect">
+            <a:avLst>
+              <a:gd name="adj" fmla="val 9119"/>
+            </a:avLst>
+          </a:prstGeom>
+          <a:solidFill>
+            <a:srgbClr val="1D2B3A"/>
+          </a:solidFill>
+          <a:ln/>
+        </p:spPr>
+      </p:sp>
+      <p:sp>
+        <p:nvSpPr>
+          <p:cNvPr id="18" name="Text 16"/>
+          <p:cNvSpPr/>
+          <p:nvPr/>
+        </p:nvSpPr>
+        <p:spPr>
+          <a:xfrm>
+            <a:off x="1041400" y="4995714"/>
+            <a:ext cx="1962150" cy="282575"/>
+          </a:xfrm>
+          <a:prstGeom prst="rect">
+            <a:avLst/>
+          </a:prstGeom>
+          <a:noFill/>
+          <a:ln/>
+        </p:spPr>
+        <p:txBody>
+          <a:bodyPr wrap="square" lIns="0" tIns="0" rIns="0" bIns="0" rtlCol="0" anchor="t">
+            <a:normAutofit/>
+          </a:bodyPr>
+          <a:lstStyle/>
+          <a:p>
+            <a:pPr algn="l" indent="0" marL="0">
+              <a:lnSpc>
+                <a:spcPts val="2025"/>
+              </a:lnSpc>
+              <a:buNone/>
+            </a:pPr>
+            <a:r>
+              <a:rPr lang="en-US" sz="1500" b="1" dirty="0">
+                <a:solidFill>
+                  <a:srgbClr val="F6F4EE"/>
+                </a:solidFill>
+                <a:latin typeface="IBM Plex Sans" pitchFamily="34" charset="0"/>
+                <a:ea typeface="IBM Plex Sans" pitchFamily="34" charset="-122"/>
+                <a:cs typeface="IBM Plex Sans" pitchFamily="34" charset="-120"/>
+              </a:rPr>
+              <a:t>Still to do</a:t>
+            </a:r>
+            <a:endParaRPr lang="en-US" sz="1500" dirty="0"/>
+          </a:p>
+        </p:txBody>
+      </p:sp>
+      <p:sp>
+        <p:nvSpPr>
+          <p:cNvPr id="19" name="Text 17"/>
+          <p:cNvSpPr/>
+          <p:nvPr/>
+        </p:nvSpPr>
+        <p:spPr>
+          <a:xfrm>
+            <a:off x="3098800" y="4884291"/>
+            <a:ext cx="8293354" cy="505420"/>
+          </a:xfrm>
+          <a:prstGeom prst="rect">
+            <a:avLst/>
+          </a:prstGeom>
+          <a:noFill/>
+          <a:ln/>
+        </p:spPr>
+        <p:txBody>
+          <a:bodyPr wrap="square" lIns="0" tIns="0" rIns="0" bIns="0" rtlCol="0" anchor="t">
+            <a:normAutofit/>
+          </a:bodyPr>
+          <a:lstStyle/>
+          <a:p>
+            <a:pPr algn="l" indent="0" marL="0">
+              <a:lnSpc>
+                <a:spcPts val="1890"/>
+              </a:lnSpc>
+              <a:buNone/>
+            </a:pPr>
+            <a:r>
+              <a:rPr lang="en-US" sz="1400" dirty="0">
+                <a:solidFill>
+                  <a:srgbClr val="D5E0E7"/>
+                </a:solidFill>
+                <a:latin typeface="IBM Plex Sans" pitchFamily="34" charset="0"/>
+                <a:ea typeface="IBM Plex Sans" pitchFamily="34" charset="-122"/>
+                <a:cs typeface="IBM Plex Sans" pitchFamily="34" charset="-120"/>
+              </a:rPr>
+              <a:t>Add the FFT convolution after the student's validation, then rerun this comparison on the new version. ZZ kernels from the two codes were already identical.</a:t>
+            </a:r>
+            <a:endParaRPr lang="en-US" sz="1400" dirty="0"/>
+          </a:p>
+        </p:txBody>
+      </p:sp>
+    </p:spTree>
+  </p:cSld>
+  <p:clrMapOvr>
+    <a:masterClrMapping/>
+  </p:clrMapOvr>
+</p:sld>
+</file>
+
 <file path=ppt/slides/slide2.xml><?xml version="1.0" encoding="utf-8"?>
 <p:sld xmlns:a="http://schemas.openxmlformats.org/drawingml/2006/main" xmlns:r="http://schemas.openxmlformats.org/officeDocument/2006/relationships" xmlns:p="http://schemas.openxmlformats.org/presentationml/2006/main">
   <p:cSld name="Slide 2">
@@ -4462,7 +6198,7 @@
         </p:nvSpPr>
         <p:spPr>
           <a:xfrm>
-            <a:off x="812800" y="949920"/>
+            <a:off x="812800" y="952500"/>
             <a:ext cx="10883392" cy="472430"/>
           </a:xfrm>
           <a:prstGeom prst="rect">
@@ -4506,7 +6242,7 @@
         </p:nvSpPr>
         <p:spPr>
           <a:xfrm>
-            <a:off x="812800" y="1574750"/>
+            <a:off x="812800" y="1574800"/>
             <a:ext cx="4185920" cy="825500"/>
           </a:xfrm>
           <a:prstGeom prst="rect">
@@ -4572,7 +6308,7 @@
         </p:nvSpPr>
         <p:spPr>
           <a:xfrm>
-            <a:off x="812800" y="2514550"/>
+            <a:off x="812800" y="2514600"/>
             <a:ext cx="4185920" cy="558800"/>
           </a:xfrm>
           <a:prstGeom prst="rect">
@@ -4682,7 +6418,7 @@
         </p:nvSpPr>
         <p:spPr>
           <a:xfrm>
-            <a:off x="812800" y="3187650"/>
+            <a:off x="812800" y="3187700"/>
             <a:ext cx="4185920" cy="558800"/>
           </a:xfrm>
           <a:prstGeom prst="rect">
@@ -4726,7 +6462,7 @@
         </p:nvSpPr>
         <p:spPr>
           <a:xfrm>
-            <a:off x="812800" y="3860750"/>
+            <a:off x="812800" y="3860800"/>
             <a:ext cx="4185920" cy="558800"/>
           </a:xfrm>
           <a:prstGeom prst="rect">
@@ -4799,7 +6535,7 @@
         </p:blipFill>
         <p:spPr>
           <a:xfrm>
-            <a:off x="5283200" y="1574750"/>
+            <a:off x="5283200" y="1574800"/>
             <a:ext cx="6096000" cy="4445000"/>
           </a:xfrm>
           <a:prstGeom prst="rect">
@@ -4815,7 +6551,7 @@
         </p:nvSpPr>
         <p:spPr>
           <a:xfrm>
-            <a:off x="7473950" y="5797699"/>
+            <a:off x="8926860" y="1981200"/>
             <a:ext cx="1701800" cy="231775"/>
           </a:xfrm>
           <a:prstGeom prst="rect">
@@ -4839,279 +6575,279 @@
             <a:r>
               <a:rPr lang="en-US" sz="1300" b="1" dirty="0">
                 <a:solidFill>
+                  <a:srgbClr val="B4531E"/>
+                </a:solidFill>
+                <a:latin typeface="IBM Plex Sans" pitchFamily="34" charset="0"/>
+                <a:ea typeface="IBM Plex Sans" pitchFamily="34" charset="-122"/>
+                <a:cs typeface="IBM Plex Sans" pitchFamily="34" charset="-120"/>
+              </a:rPr>
+              <a:t>R at receiver</a:t>
+            </a:r>
+            <a:endParaRPr lang="en-US" sz="1300" dirty="0"/>
+          </a:p>
+        </p:txBody>
+      </p:sp>
+      <p:sp>
+        <p:nvSpPr>
+          <p:cNvPr id="10" name="Text 7"/>
+          <p:cNvSpPr/>
+          <p:nvPr/>
+        </p:nvSpPr>
+        <p:spPr>
+          <a:xfrm>
+            <a:off x="8906619" y="4991646"/>
+            <a:ext cx="1701800" cy="231775"/>
+          </a:xfrm>
+          <a:prstGeom prst="rect">
+            <a:avLst/>
+          </a:prstGeom>
+          <a:noFill/>
+          <a:ln/>
+        </p:spPr>
+        <p:txBody>
+          <a:bodyPr wrap="square" lIns="0" tIns="0" rIns="0" bIns="0" rtlCol="0" anchor="t">
+            <a:normAutofit/>
+          </a:bodyPr>
+          <a:lstStyle/>
+          <a:p>
+            <a:pPr algn="l" indent="0" marL="0">
+              <a:lnSpc>
+                <a:spcPts val="1625"/>
+              </a:lnSpc>
+              <a:buNone/>
+            </a:pPr>
+            <a:r>
+              <a:rPr lang="en-US" sz="1300" b="1" dirty="0">
+                <a:solidFill>
+                  <a:srgbClr val="1D2B3A"/>
+                </a:solidFill>
+                <a:latin typeface="IBM Plex Sans" pitchFamily="34" charset="0"/>
+                <a:ea typeface="IBM Plex Sans" pitchFamily="34" charset="-122"/>
+                <a:cs typeface="IBM Plex Sans" pitchFamily="34" charset="-120"/>
+              </a:rPr>
+              <a:t>response u (x, y)</a:t>
+            </a:r>
+            <a:endParaRPr lang="en-US" sz="1300" dirty="0"/>
+          </a:p>
+        </p:txBody>
+      </p:sp>
+      <p:sp>
+        <p:nvSpPr>
+          <p:cNvPr id="11" name="Text 8"/>
+          <p:cNvSpPr/>
+          <p:nvPr/>
+        </p:nvSpPr>
+        <p:spPr>
+          <a:xfrm>
+            <a:off x="6438900" y="4909096"/>
+            <a:ext cx="1447800" cy="231775"/>
+          </a:xfrm>
+          <a:prstGeom prst="rect">
+            <a:avLst/>
+          </a:prstGeom>
+          <a:noFill/>
+          <a:ln/>
+        </p:spPr>
+        <p:txBody>
+          <a:bodyPr wrap="square" lIns="0" tIns="0" rIns="0" bIns="0" rtlCol="0" anchor="t">
+            <a:normAutofit/>
+          </a:bodyPr>
+          <a:lstStyle/>
+          <a:p>
+            <a:pPr algn="r" indent="0" marL="0">
+              <a:lnSpc>
+                <a:spcPts val="1625"/>
+              </a:lnSpc>
+              <a:buNone/>
+            </a:pPr>
+            <a:r>
+              <a:rPr lang="en-US" sz="1300" b="1" dirty="0">
+                <a:solidFill>
                   <a:srgbClr val="1F7A7A"/>
                 </a:solidFill>
                 <a:latin typeface="IBM Plex Sans" pitchFamily="34" charset="0"/>
                 <a:ea typeface="IBM Plex Sans" pitchFamily="34" charset="-122"/>
                 <a:cs typeface="IBM Plex Sans" pitchFamily="34" charset="-120"/>
               </a:rPr>
+              <a:t>TT = T · u</a:t>
+            </a:r>
+            <a:endParaRPr lang="en-US" sz="1300" dirty="0"/>
+          </a:p>
+        </p:txBody>
+      </p:sp>
+      <p:sp>
+        <p:nvSpPr>
+          <p:cNvPr id="12" name="Text 9"/>
+          <p:cNvSpPr/>
+          <p:nvPr/>
+        </p:nvSpPr>
+        <p:spPr>
+          <a:xfrm>
+            <a:off x="7636619" y="2559050"/>
+            <a:ext cx="2158365" cy="215900"/>
+          </a:xfrm>
+          <a:prstGeom prst="rect">
+            <a:avLst/>
+          </a:prstGeom>
+          <a:noFill/>
+          <a:ln/>
+        </p:spPr>
+        <p:txBody>
+          <a:bodyPr wrap="square" lIns="0" tIns="0" rIns="0" bIns="0" rtlCol="0" anchor="t">
+            <a:normAutofit/>
+          </a:bodyPr>
+          <a:lstStyle/>
+          <a:p>
+            <a:pPr algn="l" indent="0" marL="0">
+              <a:lnSpc>
+                <a:spcPts val="1500"/>
+              </a:lnSpc>
+              <a:buNone/>
+            </a:pPr>
+            <a:r>
+              <a:rPr lang="en-US" sz="1200" b="1" dirty="0">
+                <a:solidFill>
+                  <a:srgbClr val="B4531E"/>
+                </a:solidFill>
+                <a:latin typeface="IBM Plex Sans" pitchFamily="34" charset="0"/>
+                <a:ea typeface="IBM Plex Sans" pitchFamily="34" charset="-122"/>
+                <a:cs typeface="IBM Plex Sans" pitchFamily="34" charset="-120"/>
+              </a:rPr>
+              <a:t>RT = R · u (leakage)</a:t>
+            </a:r>
+            <a:endParaRPr lang="en-US" sz="1200" dirty="0"/>
+          </a:p>
+        </p:txBody>
+      </p:sp>
+      <p:sp>
+        <p:nvSpPr>
+          <p:cNvPr id="13" name="Text 10"/>
+          <p:cNvSpPr/>
+          <p:nvPr/>
+        </p:nvSpPr>
+        <p:spPr>
+          <a:xfrm>
+            <a:off x="6057900" y="5829300"/>
+            <a:ext cx="1701800" cy="215900"/>
+          </a:xfrm>
+          <a:prstGeom prst="rect">
+            <a:avLst/>
+          </a:prstGeom>
+          <a:noFill/>
+          <a:ln/>
+        </p:spPr>
+        <p:txBody>
+          <a:bodyPr wrap="square" lIns="0" tIns="0" rIns="0" bIns="0" rtlCol="0" anchor="t">
+            <a:normAutofit/>
+          </a:bodyPr>
+          <a:lstStyle/>
+          <a:p>
+            <a:pPr algn="r" indent="0" marL="0">
+              <a:lnSpc>
+                <a:spcPts val="1500"/>
+              </a:lnSpc>
+              <a:buNone/>
+            </a:pPr>
+            <a:r>
+              <a:rPr lang="en-US" sz="1200" dirty="0">
+                <a:solidFill>
+                  <a:srgbClr val="44505C"/>
+                </a:solidFill>
+                <a:latin typeface="IBM Plex Sans" pitchFamily="34" charset="0"/>
+                <a:ea typeface="IBM Plex Sans" pitchFamily="34" charset="-122"/>
+                <a:cs typeface="IBM Plex Sans" pitchFamily="34" charset="-120"/>
+              </a:rPr>
+              <a:t>x (south)</a:t>
+            </a:r>
+            <a:endParaRPr lang="en-US" sz="1200" dirty="0"/>
+          </a:p>
+        </p:txBody>
+      </p:sp>
+      <p:sp>
+        <p:nvSpPr>
+          <p:cNvPr id="14" name="Text 11"/>
+          <p:cNvSpPr/>
+          <p:nvPr/>
+        </p:nvSpPr>
+        <p:spPr>
+          <a:xfrm>
+            <a:off x="10172700" y="3238500"/>
+            <a:ext cx="1066800" cy="215900"/>
+          </a:xfrm>
+          <a:prstGeom prst="rect">
+            <a:avLst/>
+          </a:prstGeom>
+          <a:noFill/>
+          <a:ln/>
+        </p:spPr>
+        <p:txBody>
+          <a:bodyPr wrap="square" lIns="0" tIns="0" rIns="0" bIns="0" rtlCol="0" anchor="t">
+            <a:normAutofit/>
+          </a:bodyPr>
+          <a:lstStyle/>
+          <a:p>
+            <a:pPr algn="l" indent="0" marL="0">
+              <a:lnSpc>
+                <a:spcPts val="1500"/>
+              </a:lnSpc>
+              <a:buNone/>
+            </a:pPr>
+            <a:r>
+              <a:rPr lang="en-US" sz="1200" dirty="0">
+                <a:solidFill>
+                  <a:srgbClr val="44505C"/>
+                </a:solidFill>
+                <a:latin typeface="IBM Plex Sans" pitchFamily="34" charset="0"/>
+                <a:ea typeface="IBM Plex Sans" pitchFamily="34" charset="-122"/>
+                <a:cs typeface="IBM Plex Sans" pitchFamily="34" charset="-120"/>
+              </a:rPr>
+              <a:t>y (east)</a:t>
+            </a:r>
+            <a:endParaRPr lang="en-US" sz="1200" dirty="0"/>
+          </a:p>
+        </p:txBody>
+      </p:sp>
+      <p:sp>
+        <p:nvSpPr>
+          <p:cNvPr id="15" name="Text 12"/>
+          <p:cNvSpPr/>
+          <p:nvPr/>
+        </p:nvSpPr>
+        <p:spPr>
+          <a:xfrm>
+            <a:off x="7514927" y="5529064"/>
+            <a:ext cx="1701800" cy="231775"/>
+          </a:xfrm>
+          <a:prstGeom prst="rect">
+            <a:avLst/>
+          </a:prstGeom>
+          <a:noFill/>
+          <a:ln/>
+        </p:spPr>
+        <p:txBody>
+          <a:bodyPr wrap="square" lIns="0" tIns="0" rIns="0" bIns="0" rtlCol="0" anchor="t">
+            <a:normAutofit/>
+          </a:bodyPr>
+          <a:lstStyle/>
+          <a:p>
+            <a:pPr algn="l" indent="0" marL="0">
+              <a:lnSpc>
+                <a:spcPts val="1625"/>
+              </a:lnSpc>
+              <a:buNone/>
+            </a:pPr>
+            <a:r>
+              <a:rPr lang="en-US" sz="1300" b="1" dirty="0">
+                <a:solidFill>
+                  <a:srgbClr val="1F7A7A"/>
+                </a:solidFill>
+                <a:latin typeface="IBM Plex Sans" pitchFamily="34" charset="0"/>
+                <a:ea typeface="IBM Plex Sans" pitchFamily="34" charset="-122"/>
+                <a:cs typeface="IBM Plex Sans" pitchFamily="34" charset="-120"/>
+              </a:rPr>
               <a:t>T at receiver</a:t>
             </a:r>
             <a:endParaRPr lang="en-US" sz="1300" dirty="0"/>
-          </a:p>
-        </p:txBody>
-      </p:sp>
-      <p:sp>
-        <p:nvSpPr>
-          <p:cNvPr id="10" name="Text 7"/>
-          <p:cNvSpPr/>
-          <p:nvPr/>
-        </p:nvSpPr>
-        <p:spPr>
-          <a:xfrm>
-            <a:off x="8926860" y="1981150"/>
-            <a:ext cx="1701800" cy="231775"/>
-          </a:xfrm>
-          <a:prstGeom prst="rect">
-            <a:avLst/>
-          </a:prstGeom>
-          <a:noFill/>
-          <a:ln/>
-        </p:spPr>
-        <p:txBody>
-          <a:bodyPr wrap="square" lIns="0" tIns="0" rIns="0" bIns="0" rtlCol="0" anchor="t">
-            <a:normAutofit/>
-          </a:bodyPr>
-          <a:lstStyle/>
-          <a:p>
-            <a:pPr algn="l" indent="0" marL="0">
-              <a:lnSpc>
-                <a:spcPts val="1625"/>
-              </a:lnSpc>
-              <a:buNone/>
-            </a:pPr>
-            <a:r>
-              <a:rPr lang="en-US" sz="1300" b="1" dirty="0">
-                <a:solidFill>
-                  <a:srgbClr val="B4531E"/>
-                </a:solidFill>
-                <a:latin typeface="IBM Plex Sans" pitchFamily="34" charset="0"/>
-                <a:ea typeface="IBM Plex Sans" pitchFamily="34" charset="-122"/>
-                <a:cs typeface="IBM Plex Sans" pitchFamily="34" charset="-120"/>
-              </a:rPr>
-              <a:t>R at receiver</a:t>
-            </a:r>
-            <a:endParaRPr lang="en-US" sz="1300" dirty="0"/>
-          </a:p>
-        </p:txBody>
-      </p:sp>
-      <p:sp>
-        <p:nvSpPr>
-          <p:cNvPr id="11" name="Text 8"/>
-          <p:cNvSpPr/>
-          <p:nvPr/>
-        </p:nvSpPr>
-        <p:spPr>
-          <a:xfrm>
-            <a:off x="8906619" y="4991596"/>
-            <a:ext cx="1701800" cy="231775"/>
-          </a:xfrm>
-          <a:prstGeom prst="rect">
-            <a:avLst/>
-          </a:prstGeom>
-          <a:noFill/>
-          <a:ln/>
-        </p:spPr>
-        <p:txBody>
-          <a:bodyPr wrap="square" lIns="0" tIns="0" rIns="0" bIns="0" rtlCol="0" anchor="t">
-            <a:normAutofit/>
-          </a:bodyPr>
-          <a:lstStyle/>
-          <a:p>
-            <a:pPr algn="l" indent="0" marL="0">
-              <a:lnSpc>
-                <a:spcPts val="1625"/>
-              </a:lnSpc>
-              <a:buNone/>
-            </a:pPr>
-            <a:r>
-              <a:rPr lang="en-US" sz="1300" b="1" dirty="0">
-                <a:solidFill>
-                  <a:srgbClr val="1D2B3A"/>
-                </a:solidFill>
-                <a:latin typeface="IBM Plex Sans" pitchFamily="34" charset="0"/>
-                <a:ea typeface="IBM Plex Sans" pitchFamily="34" charset="-122"/>
-                <a:cs typeface="IBM Plex Sans" pitchFamily="34" charset="-120"/>
-              </a:rPr>
-              <a:t>response u (x, y)</a:t>
-            </a:r>
-            <a:endParaRPr lang="en-US" sz="1300" dirty="0"/>
-          </a:p>
-        </p:txBody>
-      </p:sp>
-      <p:sp>
-        <p:nvSpPr>
-          <p:cNvPr id="12" name="Text 9"/>
-          <p:cNvSpPr/>
-          <p:nvPr/>
-        </p:nvSpPr>
-        <p:spPr>
-          <a:xfrm>
-            <a:off x="6438900" y="4909046"/>
-            <a:ext cx="1447800" cy="231775"/>
-          </a:xfrm>
-          <a:prstGeom prst="rect">
-            <a:avLst/>
-          </a:prstGeom>
-          <a:noFill/>
-          <a:ln/>
-        </p:spPr>
-        <p:txBody>
-          <a:bodyPr wrap="square" lIns="0" tIns="0" rIns="0" bIns="0" rtlCol="0" anchor="t">
-            <a:normAutofit/>
-          </a:bodyPr>
-          <a:lstStyle/>
-          <a:p>
-            <a:pPr algn="r" indent="0" marL="0">
-              <a:lnSpc>
-                <a:spcPts val="1625"/>
-              </a:lnSpc>
-              <a:buNone/>
-            </a:pPr>
-            <a:r>
-              <a:rPr lang="en-US" sz="1300" b="1" dirty="0">
-                <a:solidFill>
-                  <a:srgbClr val="1F7A7A"/>
-                </a:solidFill>
-                <a:latin typeface="IBM Plex Sans" pitchFamily="34" charset="0"/>
-                <a:ea typeface="IBM Plex Sans" pitchFamily="34" charset="-122"/>
-                <a:cs typeface="IBM Plex Sans" pitchFamily="34" charset="-120"/>
-              </a:rPr>
-              <a:t>TT = T · u</a:t>
-            </a:r>
-            <a:endParaRPr lang="en-US" sz="1300" dirty="0"/>
-          </a:p>
-        </p:txBody>
-      </p:sp>
-      <p:sp>
-        <p:nvSpPr>
-          <p:cNvPr id="13" name="Text 10"/>
-          <p:cNvSpPr/>
-          <p:nvPr/>
-        </p:nvSpPr>
-        <p:spPr>
-          <a:xfrm>
-            <a:off x="7636619" y="2559000"/>
-            <a:ext cx="2158365" cy="215900"/>
-          </a:xfrm>
-          <a:prstGeom prst="rect">
-            <a:avLst/>
-          </a:prstGeom>
-          <a:noFill/>
-          <a:ln/>
-        </p:spPr>
-        <p:txBody>
-          <a:bodyPr wrap="square" lIns="0" tIns="0" rIns="0" bIns="0" rtlCol="0" anchor="t">
-            <a:normAutofit/>
-          </a:bodyPr>
-          <a:lstStyle/>
-          <a:p>
-            <a:pPr algn="l" indent="0" marL="0">
-              <a:lnSpc>
-                <a:spcPts val="1500"/>
-              </a:lnSpc>
-              <a:buNone/>
-            </a:pPr>
-            <a:r>
-              <a:rPr lang="en-US" sz="1200" b="1" dirty="0">
-                <a:solidFill>
-                  <a:srgbClr val="B4531E"/>
-                </a:solidFill>
-                <a:latin typeface="IBM Plex Sans" pitchFamily="34" charset="0"/>
-                <a:ea typeface="IBM Plex Sans" pitchFamily="34" charset="-122"/>
-                <a:cs typeface="IBM Plex Sans" pitchFamily="34" charset="-120"/>
-              </a:rPr>
-              <a:t>RT = R · u (leakage)</a:t>
-            </a:r>
-            <a:endParaRPr lang="en-US" sz="1200" dirty="0"/>
-          </a:p>
-        </p:txBody>
-      </p:sp>
-      <p:sp>
-        <p:nvSpPr>
-          <p:cNvPr id="14" name="Text 11"/>
-          <p:cNvSpPr/>
-          <p:nvPr/>
-        </p:nvSpPr>
-        <p:spPr>
-          <a:xfrm>
-            <a:off x="6057900" y="5829250"/>
-            <a:ext cx="1701800" cy="215900"/>
-          </a:xfrm>
-          <a:prstGeom prst="rect">
-            <a:avLst/>
-          </a:prstGeom>
-          <a:noFill/>
-          <a:ln/>
-        </p:spPr>
-        <p:txBody>
-          <a:bodyPr wrap="square" lIns="0" tIns="0" rIns="0" bIns="0" rtlCol="0" anchor="t">
-            <a:normAutofit/>
-          </a:bodyPr>
-          <a:lstStyle/>
-          <a:p>
-            <a:pPr algn="r" indent="0" marL="0">
-              <a:lnSpc>
-                <a:spcPts val="1500"/>
-              </a:lnSpc>
-              <a:buNone/>
-            </a:pPr>
-            <a:r>
-              <a:rPr lang="en-US" sz="1200" dirty="0">
-                <a:solidFill>
-                  <a:srgbClr val="44505C"/>
-                </a:solidFill>
-                <a:latin typeface="IBM Plex Sans" pitchFamily="34" charset="0"/>
-                <a:ea typeface="IBM Plex Sans" pitchFamily="34" charset="-122"/>
-                <a:cs typeface="IBM Plex Sans" pitchFamily="34" charset="-120"/>
-              </a:rPr>
-              <a:t>x (south)</a:t>
-            </a:r>
-            <a:endParaRPr lang="en-US" sz="1200" dirty="0"/>
-          </a:p>
-        </p:txBody>
-      </p:sp>
-      <p:sp>
-        <p:nvSpPr>
-          <p:cNvPr id="15" name="Text 12"/>
-          <p:cNvSpPr/>
-          <p:nvPr/>
-        </p:nvSpPr>
-        <p:spPr>
-          <a:xfrm>
-            <a:off x="10172700" y="3238450"/>
-            <a:ext cx="1066800" cy="215900"/>
-          </a:xfrm>
-          <a:prstGeom prst="rect">
-            <a:avLst/>
-          </a:prstGeom>
-          <a:noFill/>
-          <a:ln/>
-        </p:spPr>
-        <p:txBody>
-          <a:bodyPr wrap="square" lIns="0" tIns="0" rIns="0" bIns="0" rtlCol="0" anchor="t">
-            <a:normAutofit/>
-          </a:bodyPr>
-          <a:lstStyle/>
-          <a:p>
-            <a:pPr algn="l" indent="0" marL="0">
-              <a:lnSpc>
-                <a:spcPts val="1500"/>
-              </a:lnSpc>
-              <a:buNone/>
-            </a:pPr>
-            <a:r>
-              <a:rPr lang="en-US" sz="1200" dirty="0">
-                <a:solidFill>
-                  <a:srgbClr val="44505C"/>
-                </a:solidFill>
-                <a:latin typeface="IBM Plex Sans" pitchFamily="34" charset="0"/>
-                <a:ea typeface="IBM Plex Sans" pitchFamily="34" charset="-122"/>
-                <a:cs typeface="IBM Plex Sans" pitchFamily="34" charset="-120"/>
-              </a:rPr>
-              <a:t>y (east)</a:t>
-            </a:r>
-            <a:endParaRPr lang="en-US" sz="1200" dirty="0"/>
           </a:p>
         </p:txBody>
       </p:sp>
@@ -8359,7 +10095,7 @@
                 <a:ea typeface="IBM Plex Mono" pitchFamily="49" charset="-122"/>
                 <a:cs typeface="IBM Plex Mono" pitchFamily="49" charset="-120"/>
               </a:rPr>
-              <a:t>snap2sac_sphere_fxfy.m</a:t>
+              <a:t>snap2sac_sphere_TT.m</a:t>
             </a:r>
             <a:endParaRPr lang="en-US" sz="1250" dirty="0"/>
           </a:p>
@@ -8573,7 +10309,7 @@
                 <a:ea typeface="IBM Plex Mono" pitchFamily="49" charset="-122"/>
                 <a:cs typeface="IBM Plex Mono" pitchFamily="49" charset="-120"/>
               </a:rPr>
-              <a:t>kern_synthetic4kernel_fxfy.m</a:t>
+              <a:t>kern_synthetic4kernel_TT.m</a:t>
             </a:r>
             <a:endParaRPr lang="en-US" sz="1250" dirty="0"/>
           </a:p>
@@ -8593,7 +10329,7 @@
                 <a:ea typeface="IBM Plex Mono" pitchFamily="49" charset="-122"/>
                 <a:cs typeface="IBM Plex Mono" pitchFamily="49" charset="-120"/>
               </a:rPr>
-              <a:t>kern_measure2kernelconf_fxfy.sh</a:t>
+              <a:t>kern_measure2kernelconf_TT.sh</a:t>
             </a:r>
             <a:endParaRPr lang="en-US" sz="1250" dirty="0"/>
           </a:p>
@@ -8898,6 +10634,1110 @@
               <a:t>: sin α · fx + cos α · fy event strains.</a:t>
             </a:r>
             <a:endParaRPr lang="en-US" sz="1350" dirty="0"/>
+          </a:p>
+        </p:txBody>
+      </p:sp>
+    </p:spTree>
+  </p:cSld>
+  <p:clrMapOvr>
+    <a:masterClrMapping/>
+  </p:clrMapOvr>
+</p:sld>
+</file>
+
+<file path=ppt/slides/slide9.xml><?xml version="1.0" encoding="utf-8"?>
+<p:sld xmlns:a="http://schemas.openxmlformats.org/drawingml/2006/main" xmlns:r="http://schemas.openxmlformats.org/officeDocument/2006/relationships" xmlns:p="http://schemas.openxmlformats.org/presentationml/2006/main">
+  <p:cSld name="Slide 9">
+    <p:bg>
+      <p:bgPr>
+        <a:solidFill>
+          <a:srgbClr val="F6F4EE"/>
+        </a:solidFill>
+      </p:bgPr>
+    </p:bg>
+    <p:spTree>
+      <p:nvGrpSpPr>
+        <p:cNvPr id="1" name=""/>
+        <p:cNvGrpSpPr/>
+        <p:nvPr/>
+      </p:nvGrpSpPr>
+      <p:grpSpPr>
+        <a:xfrm>
+          <a:off x="0" y="0"/>
+          <a:ext cx="0" cy="0"/>
+          <a:chOff x="0" y="0"/>
+          <a:chExt cx="0" cy="0"/>
+        </a:xfrm>
+      </p:grpSpPr>
+      <p:sp>
+        <p:nvSpPr>
+          <p:cNvPr id="2" name="Text 0"/>
+          <p:cNvSpPr/>
+          <p:nvPr/>
+        </p:nvSpPr>
+        <p:spPr>
+          <a:xfrm>
+            <a:off x="812800" y="558800"/>
+            <a:ext cx="10883392" cy="238720"/>
+          </a:xfrm>
+          <a:prstGeom prst="rect">
+            <a:avLst/>
+          </a:prstGeom>
+          <a:noFill/>
+          <a:ln/>
+        </p:spPr>
+        <p:txBody>
+          <a:bodyPr wrap="square" lIns="0" tIns="0" rIns="0" bIns="0" rtlCol="0" anchor="t">
+            <a:normAutofit/>
+          </a:bodyPr>
+          <a:lstStyle/>
+          <a:p>
+            <a:pPr algn="l" indent="0" marL="0">
+              <a:lnSpc>
+                <a:spcPts val="1680"/>
+              </a:lnSpc>
+              <a:buNone/>
+            </a:pPr>
+            <a:r>
+              <a:rPr lang="en-US" sz="1200" b="1" spc="100" kern="0" dirty="0">
+                <a:solidFill>
+                  <a:srgbClr val="1F7A7A"/>
+                </a:solidFill>
+                <a:latin typeface="IBM Plex Sans" pitchFamily="34" charset="0"/>
+                <a:ea typeface="IBM Plex Sans" pitchFamily="34" charset="-122"/>
+                <a:cs typeface="IBM Plex Sans" pitchFamily="34" charset="-120"/>
+              </a:rPr>
+              <a:t>8 · KERNEL CODE</a:t>
+            </a:r>
+            <a:endParaRPr lang="en-US" sz="1200" dirty="0"/>
+          </a:p>
+        </p:txBody>
+      </p:sp>
+      <p:sp>
+        <p:nvSpPr>
+          <p:cNvPr id="3" name="Text 1"/>
+          <p:cNvSpPr/>
+          <p:nvPr>
+            <p:ph type="title"/>
+          </p:nvPr>
+        </p:nvSpPr>
+        <p:spPr>
+          <a:xfrm>
+            <a:off x="812800" y="949920"/>
+            <a:ext cx="10883392" cy="472430"/>
+          </a:xfrm>
+          <a:prstGeom prst="rect">
+            <a:avLst/>
+          </a:prstGeom>
+          <a:noFill/>
+          <a:ln/>
+        </p:spPr>
+        <p:txBody>
+          <a:bodyPr wrap="square" lIns="0" tIns="0" rIns="0" bIns="0" rtlCol="0" anchor="t">
+            <a:normAutofit/>
+          </a:bodyPr>
+          <a:lstStyle/>
+          <a:p>
+            <a:pPr algn="l" indent="0" marL="0">
+              <a:lnSpc>
+                <a:spcPts val="3520"/>
+              </a:lnSpc>
+              <a:buNone/>
+            </a:pPr>
+            <a:r>
+              <a:rPr lang="en-US" sz="3200" b="1" i="0" dirty="0">
+                <a:solidFill>
+                  <a:srgbClr val="1D2B3A"/>
+                </a:solidFill>
+                <a:latin typeface="EB Garamond" pitchFamily="18" charset="0"/>
+                <a:ea typeface="EB Garamond" pitchFamily="18" charset="-122"/>
+                <a:cs typeface="EB Garamond" pitchFamily="18" charset="-120"/>
+              </a:rPr>
+              <a:t>What changed from SI_ker_sta.F90 to SI_ker_sta_fxyz.F90</a:t>
+            </a:r>
+            <a:endParaRPr lang="en-US" sz="3200" dirty="0"/>
+          </a:p>
+        </p:txBody>
+      </p:sp>
+      <p:sp>
+        <p:nvSpPr>
+          <p:cNvPr id="4" name="Text 2"/>
+          <p:cNvSpPr/>
+          <p:nvPr/>
+        </p:nvSpPr>
+        <p:spPr>
+          <a:xfrm>
+            <a:off x="990600" y="1574750"/>
+            <a:ext cx="1638300" cy="238720"/>
+          </a:xfrm>
+          <a:prstGeom prst="rect">
+            <a:avLst/>
+          </a:prstGeom>
+          <a:noFill/>
+          <a:ln/>
+        </p:spPr>
+        <p:txBody>
+          <a:bodyPr wrap="square" lIns="0" tIns="0" rIns="0" bIns="0" rtlCol="0" anchor="t">
+            <a:normAutofit/>
+          </a:bodyPr>
+          <a:lstStyle/>
+          <a:p>
+            <a:pPr algn="l" indent="0" marL="0">
+              <a:lnSpc>
+                <a:spcPts val="1680"/>
+              </a:lnSpc>
+              <a:buNone/>
+            </a:pPr>
+            <a:r>
+              <a:rPr lang="en-US" sz="1200" b="1" spc="100" kern="0" dirty="0">
+                <a:solidFill>
+                  <a:srgbClr val="8A97A3"/>
+                </a:solidFill>
+                <a:latin typeface="IBM Plex Sans" pitchFamily="34" charset="0"/>
+                <a:ea typeface="IBM Plex Sans" pitchFamily="34" charset="-122"/>
+                <a:cs typeface="IBM Plex Sans" pitchFamily="34" charset="-120"/>
+              </a:rPr>
+              <a:t>ITEM</a:t>
+            </a:r>
+            <a:endParaRPr lang="en-US" sz="1200" dirty="0"/>
+          </a:p>
+        </p:txBody>
+      </p:sp>
+      <p:sp>
+        <p:nvSpPr>
+          <p:cNvPr id="5" name="Text 3"/>
+          <p:cNvSpPr/>
+          <p:nvPr/>
+        </p:nvSpPr>
+        <p:spPr>
+          <a:xfrm>
+            <a:off x="2730500" y="1574750"/>
+            <a:ext cx="3924300" cy="238720"/>
+          </a:xfrm>
+          <a:prstGeom prst="rect">
+            <a:avLst/>
+          </a:prstGeom>
+          <a:noFill/>
+          <a:ln/>
+        </p:spPr>
+        <p:txBody>
+          <a:bodyPr wrap="square" lIns="0" tIns="0" rIns="0" bIns="0" rtlCol="0" anchor="t">
+            <a:normAutofit/>
+          </a:bodyPr>
+          <a:lstStyle/>
+          <a:p>
+            <a:pPr algn="l" indent="0" marL="0">
+              <a:lnSpc>
+                <a:spcPts val="1680"/>
+              </a:lnSpc>
+              <a:buNone/>
+            </a:pPr>
+            <a:r>
+              <a:rPr lang="en-US" sz="1200" b="1" spc="100" kern="0" dirty="0">
+                <a:solidFill>
+                  <a:srgbClr val="8A97A3"/>
+                </a:solidFill>
+                <a:latin typeface="IBM Plex Sans" pitchFamily="34" charset="0"/>
+                <a:ea typeface="IBM Plex Sans" pitchFamily="34" charset="-122"/>
+                <a:cs typeface="IBM Plex Sans" pitchFamily="34" charset="-120"/>
+              </a:rPr>
+              <a:t>OLD CODE (ZZ ONLY)</a:t>
+            </a:r>
+            <a:endParaRPr lang="en-US" sz="1200" dirty="0"/>
+          </a:p>
+        </p:txBody>
+      </p:sp>
+      <p:sp>
+        <p:nvSpPr>
+          <p:cNvPr id="6" name="Text 4"/>
+          <p:cNvSpPr/>
+          <p:nvPr/>
+        </p:nvSpPr>
+        <p:spPr>
+          <a:xfrm>
+            <a:off x="6692900" y="1574750"/>
+            <a:ext cx="4578350" cy="238720"/>
+          </a:xfrm>
+          <a:prstGeom prst="rect">
+            <a:avLst/>
+          </a:prstGeom>
+          <a:noFill/>
+          <a:ln/>
+        </p:spPr>
+        <p:txBody>
+          <a:bodyPr wrap="square" lIns="0" tIns="0" rIns="0" bIns="0" rtlCol="0" anchor="t">
+            <a:normAutofit/>
+          </a:bodyPr>
+          <a:lstStyle/>
+          <a:p>
+            <a:pPr algn="l" indent="0" marL="0">
+              <a:lnSpc>
+                <a:spcPts val="1680"/>
+              </a:lnSpc>
+              <a:buNone/>
+            </a:pPr>
+            <a:r>
+              <a:rPr lang="en-US" sz="1200" b="1" spc="100" kern="0" dirty="0">
+                <a:solidFill>
+                  <a:srgbClr val="1F7A7A"/>
+                </a:solidFill>
+                <a:latin typeface="IBM Plex Sans" pitchFamily="34" charset="0"/>
+                <a:ea typeface="IBM Plex Sans" pitchFamily="34" charset="-122"/>
+                <a:cs typeface="IBM Plex Sans" pitchFamily="34" charset="-120"/>
+              </a:rPr>
+              <a:t>NEW CODE (TT AND ZZ)</a:t>
+            </a:r>
+            <a:endParaRPr lang="en-US" sz="1200" dirty="0"/>
+          </a:p>
+        </p:txBody>
+      </p:sp>
+      <p:sp>
+        <p:nvSpPr>
+          <p:cNvPr id="7" name="Shape 5"/>
+          <p:cNvSpPr/>
+          <p:nvPr/>
+        </p:nvSpPr>
+        <p:spPr>
+          <a:xfrm>
+            <a:off x="819150" y="1896021"/>
+            <a:ext cx="10553700" cy="712391"/>
+          </a:xfrm>
+          <a:prstGeom prst="roundRect">
+            <a:avLst>
+              <a:gd name="adj" fmla="val 9805"/>
+            </a:avLst>
+          </a:prstGeom>
+          <a:solidFill>
+            <a:srgbClr val="FBFAF6"/>
+          </a:solidFill>
+          <a:ln w="12700">
+            <a:solidFill>
+              <a:srgbClr val="D9D4C7"/>
+            </a:solidFill>
+            <a:prstDash val="solid"/>
+          </a:ln>
+        </p:spPr>
+      </p:sp>
+      <p:sp>
+        <p:nvSpPr>
+          <p:cNvPr id="8" name="Text 6"/>
+          <p:cNvSpPr/>
+          <p:nvPr/>
+        </p:nvSpPr>
+        <p:spPr>
+          <a:xfrm>
+            <a:off x="1003300" y="2123331"/>
+            <a:ext cx="1638300" cy="283170"/>
+          </a:xfrm>
+          <a:prstGeom prst="rect">
+            <a:avLst/>
+          </a:prstGeom>
+          <a:noFill/>
+          <a:ln/>
+        </p:spPr>
+        <p:txBody>
+          <a:bodyPr wrap="square" lIns="0" tIns="0" rIns="0" bIns="0" rtlCol="0" anchor="t">
+            <a:normAutofit/>
+          </a:bodyPr>
+          <a:lstStyle/>
+          <a:p>
+            <a:pPr algn="l" indent="0" marL="0">
+              <a:lnSpc>
+                <a:spcPts val="2030"/>
+              </a:lnSpc>
+              <a:buNone/>
+            </a:pPr>
+            <a:r>
+              <a:rPr lang="en-US" sz="1450" b="1" dirty="0">
+                <a:solidFill>
+                  <a:srgbClr val="1D2B3A"/>
+                </a:solidFill>
+                <a:latin typeface="IBM Plex Sans" pitchFamily="34" charset="0"/>
+                <a:ea typeface="IBM Plex Sans" pitchFamily="34" charset="-122"/>
+                <a:cs typeface="IBM Plex Sans" pitchFamily="34" charset="-120"/>
+              </a:rPr>
+              <a:t>Source side</a:t>
+            </a:r>
+            <a:endParaRPr lang="en-US" sz="1450" dirty="0"/>
+          </a:p>
+        </p:txBody>
+      </p:sp>
+      <p:sp>
+        <p:nvSpPr>
+          <p:cNvPr id="9" name="Text 7"/>
+          <p:cNvSpPr/>
+          <p:nvPr/>
+        </p:nvSpPr>
+        <p:spPr>
+          <a:xfrm>
+            <a:off x="2743200" y="2029371"/>
+            <a:ext cx="3924300" cy="471091"/>
+          </a:xfrm>
+          <a:prstGeom prst="rect">
+            <a:avLst/>
+          </a:prstGeom>
+          <a:noFill/>
+          <a:ln/>
+        </p:spPr>
+        <p:txBody>
+          <a:bodyPr wrap="square" lIns="0" tIns="0" rIns="0" bIns="0" rtlCol="0" anchor="t">
+            <a:normAutofit/>
+          </a:bodyPr>
+          <a:lstStyle/>
+          <a:p>
+            <a:pPr algn="l" indent="0" marL="0">
+              <a:lnSpc>
+                <a:spcPts val="1755"/>
+              </a:lnSpc>
+              <a:buNone/>
+            </a:pPr>
+            <a:r>
+              <a:rPr lang="en-US" sz="1300" dirty="0">
+                <a:solidFill>
+                  <a:srgbClr val="44505C"/>
+                </a:solidFill>
+                <a:latin typeface="IBM Plex Sans" pitchFamily="34" charset="0"/>
+                <a:ea typeface="IBM Plex Sans" pitchFamily="34" charset="-122"/>
+                <a:cs typeface="IBM Plex Sans" pitchFamily="34" charset="-120"/>
+              </a:rPr>
+              <a:t>One event run (EVENT_OUTD); no source weights are read.</a:t>
+            </a:r>
+            <a:endParaRPr lang="en-US" sz="1300" dirty="0"/>
+          </a:p>
+        </p:txBody>
+      </p:sp>
+      <p:sp>
+        <p:nvSpPr>
+          <p:cNvPr id="10" name="Text 8"/>
+          <p:cNvSpPr/>
+          <p:nvPr/>
+        </p:nvSpPr>
+        <p:spPr>
+          <a:xfrm>
+            <a:off x="6705600" y="2029371"/>
+            <a:ext cx="4578350" cy="471091"/>
+          </a:xfrm>
+          <a:prstGeom prst="rect">
+            <a:avLst/>
+          </a:prstGeom>
+          <a:noFill/>
+          <a:ln/>
+        </p:spPr>
+        <p:txBody>
+          <a:bodyPr wrap="square" lIns="0" tIns="0" rIns="0" bIns="0" rtlCol="0" anchor="t">
+            <a:normAutofit/>
+          </a:bodyPr>
+          <a:lstStyle/>
+          <a:p>
+            <a:pPr algn="l" indent="0" marL="0">
+              <a:lnSpc>
+                <a:spcPts val="1755"/>
+              </a:lnSpc>
+              <a:buNone/>
+            </a:pPr>
+            <a:r>
+              <a:rPr lang="en-US" sz="1300" b="1" dirty="0">
+                <a:solidFill>
+                  <a:srgbClr val="1D2B3A"/>
+                </a:solidFill>
+                <a:latin typeface="IBM Plex Sans" pitchFamily="34" charset="0"/>
+                <a:ea typeface="IBM Plex Sans" pitchFamily="34" charset="-122"/>
+                <a:cs typeface="IBM Plex Sans" pitchFamily="34" charset="-120"/>
+              </a:rPr>
+              <a:t>Mixes the event SGTs</a:t>
+            </a:r>
+            <a:r>
+              <a:rPr lang="en-US" sz="1300" dirty="0">
+                <a:solidFill>
+                  <a:srgbClr val="44505C"/>
+                </a:solidFill>
+                <a:latin typeface="IBM Plex Sans" pitchFamily="34" charset="0"/>
+                <a:ea typeface="IBM Plex Sans" pitchFamily="34" charset="-122"/>
+                <a:cs typeface="IBM Plex Sans" pitchFamily="34" charset="-120"/>
+              </a:rPr>
+              <a:t>: wsrc(1) · fx run + wsrc(2) · fy run, i.e. sin α and cos α.</a:t>
+            </a:r>
+            <a:endParaRPr lang="en-US" sz="1300" dirty="0"/>
+          </a:p>
+        </p:txBody>
+      </p:sp>
+      <p:sp>
+        <p:nvSpPr>
+          <p:cNvPr id="11" name="Shape 9"/>
+          <p:cNvSpPr/>
+          <p:nvPr/>
+        </p:nvSpPr>
+        <p:spPr>
+          <a:xfrm>
+            <a:off x="819150" y="2722711"/>
+            <a:ext cx="10553700" cy="935236"/>
+          </a:xfrm>
+          <a:prstGeom prst="roundRect">
+            <a:avLst>
+              <a:gd name="adj" fmla="val 7469"/>
+            </a:avLst>
+          </a:prstGeom>
+          <a:solidFill>
+            <a:srgbClr val="FBFAF6"/>
+          </a:solidFill>
+          <a:ln w="12700">
+            <a:solidFill>
+              <a:srgbClr val="D9D4C7"/>
+            </a:solidFill>
+            <a:prstDash val="solid"/>
+          </a:ln>
+        </p:spPr>
+      </p:sp>
+      <p:sp>
+        <p:nvSpPr>
+          <p:cNvPr id="12" name="Text 10"/>
+          <p:cNvSpPr/>
+          <p:nvPr/>
+        </p:nvSpPr>
+        <p:spPr>
+          <a:xfrm>
+            <a:off x="1003300" y="3061444"/>
+            <a:ext cx="1638300" cy="283170"/>
+          </a:xfrm>
+          <a:prstGeom prst="rect">
+            <a:avLst/>
+          </a:prstGeom>
+          <a:noFill/>
+          <a:ln/>
+        </p:spPr>
+        <p:txBody>
+          <a:bodyPr wrap="square" lIns="0" tIns="0" rIns="0" bIns="0" rtlCol="0" anchor="t">
+            <a:normAutofit/>
+          </a:bodyPr>
+          <a:lstStyle/>
+          <a:p>
+            <a:pPr algn="l" indent="0" marL="0">
+              <a:lnSpc>
+                <a:spcPts val="2030"/>
+              </a:lnSpc>
+              <a:buNone/>
+            </a:pPr>
+            <a:r>
+              <a:rPr lang="en-US" sz="1450" b="1" dirty="0">
+                <a:solidFill>
+                  <a:srgbClr val="1D2B3A"/>
+                </a:solidFill>
+                <a:latin typeface="IBM Plex Sans" pitchFamily="34" charset="0"/>
+                <a:ea typeface="IBM Plex Sans" pitchFamily="34" charset="-122"/>
+                <a:cs typeface="IBM Plex Sans" pitchFamily="34" charset="-120"/>
+              </a:rPr>
+              <a:t>Receiver side</a:t>
+            </a:r>
+            <a:endParaRPr lang="en-US" sz="1450" dirty="0"/>
+          </a:p>
+        </p:txBody>
+      </p:sp>
+      <p:sp>
+        <p:nvSpPr>
+          <p:cNvPr id="13" name="Text 11"/>
+          <p:cNvSpPr/>
+          <p:nvPr/>
+        </p:nvSpPr>
+        <p:spPr>
+          <a:xfrm>
+            <a:off x="2743200" y="2967484"/>
+            <a:ext cx="3924300" cy="471091"/>
+          </a:xfrm>
+          <a:prstGeom prst="rect">
+            <a:avLst/>
+          </a:prstGeom>
+          <a:noFill/>
+          <a:ln/>
+        </p:spPr>
+        <p:txBody>
+          <a:bodyPr wrap="square" lIns="0" tIns="0" rIns="0" bIns="0" rtlCol="0" anchor="t">
+            <a:normAutofit/>
+          </a:bodyPr>
+          <a:lstStyle/>
+          <a:p>
+            <a:pPr algn="l" indent="0" marL="0">
+              <a:lnSpc>
+                <a:spcPts val="1755"/>
+              </a:lnSpc>
+              <a:buNone/>
+            </a:pPr>
+            <a:r>
+              <a:rPr lang="en-US" sz="1300" dirty="0">
+                <a:solidFill>
+                  <a:srgbClr val="44505C"/>
+                </a:solidFill>
+                <a:latin typeface="IBM Plex Sans" pitchFamily="34" charset="0"/>
+                <a:ea typeface="IBM Plex Sans" pitchFamily="34" charset="-122"/>
+                <a:cs typeface="IBM Plex Sans" pitchFamily="34" charset="-120"/>
+              </a:rPr>
+              <a:t>Station X, Y, Z SGTs always loaded; rot_mat applied to the synthetics and scattered fields.</a:t>
+            </a:r>
+            <a:endParaRPr lang="en-US" sz="1300" dirty="0"/>
+          </a:p>
+        </p:txBody>
+      </p:sp>
+      <p:sp>
+        <p:nvSpPr>
+          <p:cNvPr id="14" name="Text 12"/>
+          <p:cNvSpPr/>
+          <p:nvPr/>
+        </p:nvSpPr>
+        <p:spPr>
+          <a:xfrm>
+            <a:off x="6705600" y="2856061"/>
+            <a:ext cx="4578350" cy="693936"/>
+          </a:xfrm>
+          <a:prstGeom prst="rect">
+            <a:avLst/>
+          </a:prstGeom>
+          <a:noFill/>
+          <a:ln/>
+        </p:spPr>
+        <p:txBody>
+          <a:bodyPr wrap="square" lIns="0" tIns="0" rIns="0" bIns="0" rtlCol="0" anchor="t">
+            <a:normAutofit/>
+          </a:bodyPr>
+          <a:lstStyle/>
+          <a:p>
+            <a:pPr algn="l" indent="0" marL="0">
+              <a:lnSpc>
+                <a:spcPts val="1755"/>
+              </a:lnSpc>
+              <a:buNone/>
+            </a:pPr>
+            <a:r>
+              <a:rPr lang="en-US" sz="1300" b="1" dirty="0">
+                <a:solidFill>
+                  <a:srgbClr val="1D2B3A"/>
+                </a:solidFill>
+                <a:latin typeface="IBM Plex Sans" pitchFamily="34" charset="0"/>
+                <a:ea typeface="IBM Plex Sans" pitchFamily="34" charset="-122"/>
+                <a:cs typeface="IBM Plex Sans" pitchFamily="34" charset="-120"/>
+              </a:rPr>
+              <a:t>Receiver weights</a:t>
+            </a:r>
+            <a:r>
+              <a:rPr lang="en-US" sz="1300" dirty="0">
+                <a:solidFill>
+                  <a:srgbClr val="44505C"/>
+                </a:solidFill>
+                <a:latin typeface="IBM Plex Sans" pitchFamily="34" charset="0"/>
+                <a:ea typeface="IBM Plex Sans" pitchFamily="34" charset="-122"/>
+                <a:cs typeface="IBM Plex Sans" pitchFamily="34" charset="-120"/>
+              </a:rPr>
+              <a:t> from the rot_mat column of the picked channel; only the components with non-zero weight are loaded.</a:t>
+            </a:r>
+            <a:endParaRPr lang="en-US" sz="1300" dirty="0"/>
+          </a:p>
+        </p:txBody>
+      </p:sp>
+      <p:sp>
+        <p:nvSpPr>
+          <p:cNvPr id="15" name="Shape 13"/>
+          <p:cNvSpPr/>
+          <p:nvPr/>
+        </p:nvSpPr>
+        <p:spPr>
+          <a:xfrm>
+            <a:off x="819150" y="3772247"/>
+            <a:ext cx="10553700" cy="524470"/>
+          </a:xfrm>
+          <a:prstGeom prst="roundRect">
+            <a:avLst>
+              <a:gd name="adj" fmla="val 13318"/>
+            </a:avLst>
+          </a:prstGeom>
+          <a:solidFill>
+            <a:srgbClr val="FBFAF6"/>
+          </a:solidFill>
+          <a:ln w="12700">
+            <a:solidFill>
+              <a:srgbClr val="D9D4C7"/>
+            </a:solidFill>
+            <a:prstDash val="solid"/>
+          </a:ln>
+        </p:spPr>
+      </p:sp>
+      <p:sp>
+        <p:nvSpPr>
+          <p:cNvPr id="16" name="Text 14"/>
+          <p:cNvSpPr/>
+          <p:nvPr/>
+        </p:nvSpPr>
+        <p:spPr>
+          <a:xfrm>
+            <a:off x="1003300" y="3905597"/>
+            <a:ext cx="1638300" cy="283170"/>
+          </a:xfrm>
+          <a:prstGeom prst="rect">
+            <a:avLst/>
+          </a:prstGeom>
+          <a:noFill/>
+          <a:ln/>
+        </p:spPr>
+        <p:txBody>
+          <a:bodyPr wrap="square" lIns="0" tIns="0" rIns="0" bIns="0" rtlCol="0" anchor="t">
+            <a:normAutofit/>
+          </a:bodyPr>
+          <a:lstStyle/>
+          <a:p>
+            <a:pPr algn="l" indent="0" marL="0">
+              <a:lnSpc>
+                <a:spcPts val="2030"/>
+              </a:lnSpc>
+              <a:buNone/>
+            </a:pPr>
+            <a:r>
+              <a:rPr lang="en-US" sz="1450" b="1" dirty="0">
+                <a:solidFill>
+                  <a:srgbClr val="1D2B3A"/>
+                </a:solidFill>
+                <a:latin typeface="IBM Plex Sans" pitchFamily="34" charset="0"/>
+                <a:ea typeface="IBM Plex Sans" pitchFamily="34" charset="-122"/>
+                <a:cs typeface="IBM Plex Sans" pitchFamily="34" charset="-120"/>
+              </a:rPr>
+              <a:t>Pair line in conf</a:t>
+            </a:r>
+            <a:endParaRPr lang="en-US" sz="1450" dirty="0"/>
+          </a:p>
+        </p:txBody>
+      </p:sp>
+      <p:sp>
+        <p:nvSpPr>
+          <p:cNvPr id="17" name="Text 15"/>
+          <p:cNvSpPr/>
+          <p:nvPr/>
+        </p:nvSpPr>
+        <p:spPr>
+          <a:xfrm>
+            <a:off x="2743200" y="3927822"/>
+            <a:ext cx="3924300" cy="238720"/>
+          </a:xfrm>
+          <a:prstGeom prst="rect">
+            <a:avLst/>
+          </a:prstGeom>
+          <a:noFill/>
+          <a:ln/>
+        </p:spPr>
+        <p:txBody>
+          <a:bodyPr wrap="square" lIns="0" tIns="0" rIns="0" bIns="0" rtlCol="0" anchor="t">
+            <a:normAutofit/>
+          </a:bodyPr>
+          <a:lstStyle/>
+          <a:p>
+            <a:pPr algn="l" indent="0" marL="0">
+              <a:lnSpc>
+                <a:spcPts val="1680"/>
+              </a:lnSpc>
+              <a:buNone/>
+            </a:pPr>
+            <a:r>
+              <a:rPr lang="en-US" sz="1200" dirty="0">
+                <a:solidFill>
+                  <a:srgbClr val="1D2B3A"/>
+                </a:solidFill>
+                <a:latin typeface="IBM Plex Mono" pitchFamily="49" charset="0"/>
+                <a:ea typeface="IBM Plex Mono" pitchFamily="49" charset="-122"/>
+                <a:cs typeface="IBM Plex Mono" pitchFamily="49" charset="-120"/>
+              </a:rPr>
+              <a:t>event picknum(6) rot_mat(9)</a:t>
+            </a:r>
+            <a:endParaRPr lang="en-US" sz="1200" dirty="0"/>
+          </a:p>
+        </p:txBody>
+      </p:sp>
+      <p:sp>
+        <p:nvSpPr>
+          <p:cNvPr id="18" name="Text 16"/>
+          <p:cNvSpPr/>
+          <p:nvPr/>
+        </p:nvSpPr>
+        <p:spPr>
+          <a:xfrm>
+            <a:off x="6705600" y="3927822"/>
+            <a:ext cx="4578350" cy="238720"/>
+          </a:xfrm>
+          <a:prstGeom prst="rect">
+            <a:avLst/>
+          </a:prstGeom>
+          <a:noFill/>
+          <a:ln/>
+        </p:spPr>
+        <p:txBody>
+          <a:bodyPr wrap="square" lIns="0" tIns="0" rIns="0" bIns="0" rtlCol="0" anchor="t">
+            <a:normAutofit/>
+          </a:bodyPr>
+          <a:lstStyle/>
+          <a:p>
+            <a:pPr algn="l" indent="0" marL="0">
+              <a:lnSpc>
+                <a:spcPts val="1680"/>
+              </a:lnSpc>
+              <a:buNone/>
+            </a:pPr>
+            <a:r>
+              <a:rPr lang="en-US" sz="1200" dirty="0">
+                <a:solidFill>
+                  <a:srgbClr val="1D2B3A"/>
+                </a:solidFill>
+                <a:latin typeface="IBM Plex Mono" pitchFamily="49" charset="0"/>
+                <a:ea typeface="IBM Plex Mono" pitchFamily="49" charset="-122"/>
+                <a:cs typeface="IBM Plex Mono" pitchFamily="49" charset="-120"/>
+              </a:rPr>
+              <a:t>event picknum(6) rot_mat(9) sinα cosα</a:t>
+            </a:r>
+            <a:endParaRPr lang="en-US" sz="1200" dirty="0"/>
+          </a:p>
+        </p:txBody>
+      </p:sp>
+      <p:sp>
+        <p:nvSpPr>
+          <p:cNvPr id="19" name="Shape 17"/>
+          <p:cNvSpPr/>
+          <p:nvPr/>
+        </p:nvSpPr>
+        <p:spPr>
+          <a:xfrm>
+            <a:off x="819150" y="4411018"/>
+            <a:ext cx="10553700" cy="712391"/>
+          </a:xfrm>
+          <a:prstGeom prst="roundRect">
+            <a:avLst>
+              <a:gd name="adj" fmla="val 9805"/>
+            </a:avLst>
+          </a:prstGeom>
+          <a:solidFill>
+            <a:srgbClr val="FBFAF6"/>
+          </a:solidFill>
+          <a:ln w="12700">
+            <a:solidFill>
+              <a:srgbClr val="D9D4C7"/>
+            </a:solidFill>
+            <a:prstDash val="solid"/>
+          </a:ln>
+        </p:spPr>
+      </p:sp>
+      <p:sp>
+        <p:nvSpPr>
+          <p:cNvPr id="20" name="Text 18"/>
+          <p:cNvSpPr/>
+          <p:nvPr/>
+        </p:nvSpPr>
+        <p:spPr>
+          <a:xfrm>
+            <a:off x="1003300" y="4638328"/>
+            <a:ext cx="1638300" cy="283170"/>
+          </a:xfrm>
+          <a:prstGeom prst="rect">
+            <a:avLst/>
+          </a:prstGeom>
+          <a:noFill/>
+          <a:ln/>
+        </p:spPr>
+        <p:txBody>
+          <a:bodyPr wrap="square" lIns="0" tIns="0" rIns="0" bIns="0" rtlCol="0" anchor="t">
+            <a:normAutofit/>
+          </a:bodyPr>
+          <a:lstStyle/>
+          <a:p>
+            <a:pPr algn="l" indent="0" marL="0">
+              <a:lnSpc>
+                <a:spcPts val="2030"/>
+              </a:lnSpc>
+              <a:buNone/>
+            </a:pPr>
+            <a:r>
+              <a:rPr lang="en-US" sz="1450" b="1" dirty="0">
+                <a:solidFill>
+                  <a:srgbClr val="1D2B3A"/>
+                </a:solidFill>
+                <a:latin typeface="IBM Plex Sans" pitchFamily="34" charset="0"/>
+                <a:ea typeface="IBM Plex Sans" pitchFamily="34" charset="-122"/>
+                <a:cs typeface="IBM Plex Sans" pitchFamily="34" charset="-120"/>
+              </a:rPr>
+              <a:t>Convolution</a:t>
+            </a:r>
+            <a:endParaRPr lang="en-US" sz="1450" dirty="0"/>
+          </a:p>
+        </p:txBody>
+      </p:sp>
+      <p:sp>
+        <p:nvSpPr>
+          <p:cNvPr id="21" name="Text 19"/>
+          <p:cNvSpPr/>
+          <p:nvPr/>
+        </p:nvSpPr>
+        <p:spPr>
+          <a:xfrm>
+            <a:off x="2743200" y="4655790"/>
+            <a:ext cx="3924300" cy="248245"/>
+          </a:xfrm>
+          <a:prstGeom prst="rect">
+            <a:avLst/>
+          </a:prstGeom>
+          <a:noFill/>
+          <a:ln/>
+        </p:spPr>
+        <p:txBody>
+          <a:bodyPr wrap="square" lIns="0" tIns="0" rIns="0" bIns="0" rtlCol="0" anchor="t">
+            <a:normAutofit/>
+          </a:bodyPr>
+          <a:lstStyle/>
+          <a:p>
+            <a:pPr algn="l" indent="0" marL="0">
+              <a:lnSpc>
+                <a:spcPts val="1755"/>
+              </a:lnSpc>
+              <a:buNone/>
+            </a:pPr>
+            <a:r>
+              <a:rPr lang="en-US" sz="1300" dirty="0">
+                <a:solidFill>
+                  <a:srgbClr val="44505C"/>
+                </a:solidFill>
+                <a:latin typeface="IBM Plex Sans" pitchFamily="34" charset="0"/>
+                <a:ea typeface="IBM Plex Sans" pitchFamily="34" charset="-122"/>
+                <a:cs typeface="IBM Plex Sans" pitchFamily="34" charset="-120"/>
+              </a:rPr>
+              <a:t>Full time sum in every grid cell.</a:t>
+            </a:r>
+            <a:endParaRPr lang="en-US" sz="1300" dirty="0"/>
+          </a:p>
+        </p:txBody>
+      </p:sp>
+      <p:sp>
+        <p:nvSpPr>
+          <p:cNvPr id="22" name="Text 20"/>
+          <p:cNvSpPr/>
+          <p:nvPr/>
+        </p:nvSpPr>
+        <p:spPr>
+          <a:xfrm>
+            <a:off x="6705600" y="4544368"/>
+            <a:ext cx="4578350" cy="471091"/>
+          </a:xfrm>
+          <a:prstGeom prst="rect">
+            <a:avLst/>
+          </a:prstGeom>
+          <a:noFill/>
+          <a:ln/>
+        </p:spPr>
+        <p:txBody>
+          <a:bodyPr wrap="square" lIns="0" tIns="0" rIns="0" bIns="0" rtlCol="0" anchor="t">
+            <a:normAutofit/>
+          </a:bodyPr>
+          <a:lstStyle/>
+          <a:p>
+            <a:pPr algn="l" indent="0" marL="0">
+              <a:lnSpc>
+                <a:spcPts val="1755"/>
+              </a:lnSpc>
+              <a:buNone/>
+            </a:pPr>
+            <a:r>
+              <a:rPr lang="en-US" sz="1300" b="1" dirty="0">
+                <a:solidFill>
+                  <a:srgbClr val="1D2B3A"/>
+                </a:solidFill>
+                <a:latin typeface="IBM Plex Sans" pitchFamily="34" charset="0"/>
+                <a:ea typeface="IBM Plex Sans" pitchFamily="34" charset="-122"/>
+                <a:cs typeface="IBM Plex Sans" pitchFamily="34" charset="-120"/>
+              </a:rPr>
+              <a:t>Skips leading zeros</a:t>
+            </a:r>
+            <a:r>
+              <a:rPr lang="en-US" sz="1300" dirty="0">
+                <a:solidFill>
+                  <a:srgbClr val="44505C"/>
+                </a:solidFill>
+                <a:latin typeface="IBM Plex Sans" pitchFamily="34" charset="0"/>
+                <a:ea typeface="IBM Plex Sans" pitchFamily="34" charset="-122"/>
+                <a:cs typeface="IBM Plex Sans" pitchFamily="34" charset="-120"/>
+              </a:rPr>
+              <a:t> of the SGT; stops at the last pick for the P1 and N filters (not P2).</a:t>
+            </a:r>
+            <a:endParaRPr lang="en-US" sz="1300" dirty="0"/>
+          </a:p>
+        </p:txBody>
+      </p:sp>
+      <p:sp>
+        <p:nvSpPr>
+          <p:cNvPr id="23" name="Shape 21"/>
+          <p:cNvSpPr/>
+          <p:nvPr/>
+        </p:nvSpPr>
+        <p:spPr>
+          <a:xfrm>
+            <a:off x="819150" y="5237708"/>
+            <a:ext cx="10553700" cy="712391"/>
+          </a:xfrm>
+          <a:prstGeom prst="roundRect">
+            <a:avLst>
+              <a:gd name="adj" fmla="val 9805"/>
+            </a:avLst>
+          </a:prstGeom>
+          <a:solidFill>
+            <a:srgbClr val="FBFAF6"/>
+          </a:solidFill>
+          <a:ln w="12700">
+            <a:solidFill>
+              <a:srgbClr val="D9D4C7"/>
+            </a:solidFill>
+            <a:prstDash val="solid"/>
+          </a:ln>
+        </p:spPr>
+      </p:sp>
+      <p:sp>
+        <p:nvSpPr>
+          <p:cNvPr id="24" name="Text 22"/>
+          <p:cNvSpPr/>
+          <p:nvPr/>
+        </p:nvSpPr>
+        <p:spPr>
+          <a:xfrm>
+            <a:off x="1003300" y="5465018"/>
+            <a:ext cx="1638300" cy="283170"/>
+          </a:xfrm>
+          <a:prstGeom prst="rect">
+            <a:avLst/>
+          </a:prstGeom>
+          <a:noFill/>
+          <a:ln/>
+        </p:spPr>
+        <p:txBody>
+          <a:bodyPr wrap="square" lIns="0" tIns="0" rIns="0" bIns="0" rtlCol="0" anchor="t">
+            <a:normAutofit/>
+          </a:bodyPr>
+          <a:lstStyle/>
+          <a:p>
+            <a:pPr algn="l" indent="0" marL="0">
+              <a:lnSpc>
+                <a:spcPts val="2030"/>
+              </a:lnSpc>
+              <a:buNone/>
+            </a:pPr>
+            <a:r>
+              <a:rPr lang="en-US" sz="1450" b="1" dirty="0">
+                <a:solidFill>
+                  <a:srgbClr val="1D2B3A"/>
+                </a:solidFill>
+                <a:latin typeface="IBM Plex Sans" pitchFamily="34" charset="0"/>
+                <a:ea typeface="IBM Plex Sans" pitchFamily="34" charset="-122"/>
+                <a:cs typeface="IBM Plex Sans" pitchFamily="34" charset="-120"/>
+              </a:rPr>
+              <a:t>Kernel folders</a:t>
+            </a:r>
+            <a:endParaRPr lang="en-US" sz="1450" dirty="0"/>
+          </a:p>
+        </p:txBody>
+      </p:sp>
+      <p:sp>
+        <p:nvSpPr>
+          <p:cNvPr id="25" name="Text 23"/>
+          <p:cNvSpPr/>
+          <p:nvPr/>
+        </p:nvSpPr>
+        <p:spPr>
+          <a:xfrm>
+            <a:off x="2743200" y="5482481"/>
+            <a:ext cx="3924300" cy="248245"/>
+          </a:xfrm>
+          <a:prstGeom prst="rect">
+            <a:avLst/>
+          </a:prstGeom>
+          <a:noFill/>
+          <a:ln/>
+        </p:spPr>
+        <p:txBody>
+          <a:bodyPr wrap="square" lIns="0" tIns="0" rIns="0" bIns="0" rtlCol="0" anchor="t">
+            <a:normAutofit/>
+          </a:bodyPr>
+          <a:lstStyle/>
+          <a:p>
+            <a:pPr algn="l" indent="0" marL="0">
+              <a:lnSpc>
+                <a:spcPts val="1755"/>
+              </a:lnSpc>
+              <a:buNone/>
+            </a:pPr>
+            <a:r>
+              <a:rPr lang="en-US" sz="1300" dirty="0">
+                <a:solidFill>
+                  <a:srgbClr val="44505C"/>
+                </a:solidFill>
+                <a:latin typeface="IBM Plex Sans" pitchFamily="34" charset="0"/>
+                <a:ea typeface="IBM Plex Sans" pitchFamily="34" charset="-122"/>
+                <a:cs typeface="IBM Plex Sans" pitchFamily="34" charset="-120"/>
+              </a:rPr>
+              <a:t>Written per pick line (phase_Vp, phase_Vs).</a:t>
+            </a:r>
+            <a:endParaRPr lang="en-US" sz="1300" dirty="0"/>
+          </a:p>
+        </p:txBody>
+      </p:sp>
+      <p:sp>
+        <p:nvSpPr>
+          <p:cNvPr id="26" name="Text 24"/>
+          <p:cNvSpPr/>
+          <p:nvPr/>
+        </p:nvSpPr>
+        <p:spPr>
+          <a:xfrm>
+            <a:off x="6705600" y="5371058"/>
+            <a:ext cx="4578350" cy="471091"/>
+          </a:xfrm>
+          <a:prstGeom prst="rect">
+            <a:avLst/>
+          </a:prstGeom>
+          <a:noFill/>
+          <a:ln/>
+        </p:spPr>
+        <p:txBody>
+          <a:bodyPr wrap="square" lIns="0" tIns="0" rIns="0" bIns="0" rtlCol="0" anchor="t">
+            <a:normAutofit/>
+          </a:bodyPr>
+          <a:lstStyle/>
+          <a:p>
+            <a:pPr algn="l" indent="0" marL="0">
+              <a:lnSpc>
+                <a:spcPts val="1755"/>
+              </a:lnSpc>
+              <a:buNone/>
+            </a:pPr>
+            <a:r>
+              <a:rPr lang="en-US" sz="1300" dirty="0">
+                <a:solidFill>
+                  <a:srgbClr val="44505C"/>
+                </a:solidFill>
+                <a:latin typeface="IBM Plex Sans" pitchFamily="34" charset="0"/>
+                <a:ea typeface="IBM Plex Sans" pitchFamily="34" charset="-122"/>
+                <a:cs typeface="IBM Plex Sans" pitchFamily="34" charset="-120"/>
+              </a:rPr>
+              <a:t>Same layout, so </a:t>
+            </a:r>
+            <a:r>
+              <a:rPr lang="en-US" sz="1300" b="1" dirty="0">
+                <a:solidFill>
+                  <a:srgbClr val="1D2B3A"/>
+                </a:solidFill>
+                <a:latin typeface="IBM Plex Sans" pitchFamily="34" charset="0"/>
+                <a:ea typeface="IBM Plex Sans" pitchFamily="34" charset="-122"/>
+                <a:cs typeface="IBM Plex Sans" pitchFamily="34" charset="-120"/>
+              </a:rPr>
+              <a:t>SI_ker2assm and the solver need no change</a:t>
+            </a:r>
+            <a:r>
+              <a:rPr lang="en-US" sz="1300" dirty="0">
+                <a:solidFill>
+                  <a:srgbClr val="44505C"/>
+                </a:solidFill>
+                <a:latin typeface="IBM Plex Sans" pitchFamily="34" charset="0"/>
+                <a:ea typeface="IBM Plex Sans" pitchFamily="34" charset="-122"/>
+                <a:cs typeface="IBM Plex Sans" pitchFamily="34" charset="-120"/>
+              </a:rPr>
+              <a:t>.</a:t>
+            </a:r>
+            <a:endParaRPr lang="en-US" sz="1300" dirty="0"/>
           </a:p>
         </p:txBody>
       </p:sp>
@@ -8914,16 +11754,16 @@
   <a:themeElements>
     <a:clrScheme name="Love waves from fx and fy runs">
       <a:dk1>
-        <a:srgbClr val="44505C"/>
+        <a:srgbClr val="1D2B3A"/>
       </a:dk1>
       <a:lt1>
         <a:srgbClr val="F6F4EE"/>
       </a:lt1>
       <a:dk2>
-        <a:srgbClr val="717981"/>
+        <a:srgbClr val="535D67"/>
       </a:dk2>
       <a:lt2>
-        <a:srgbClr val="E4E4DF"/>
+        <a:srgbClr val="E0E0DC"/>
       </a:lt2>
       <a:accent1>
         <a:srgbClr val="1F7A7A"/>
@@ -8935,13 +11775,13 @@
         <a:srgbClr val="7FD1CB"/>
       </a:accent3>
       <a:accent4>
-        <a:srgbClr val="1D2B3A"/>
+        <a:srgbClr val="44505C"/>
       </a:accent4>
       <a:accent5>
-        <a:srgbClr val="BFD0DA"/>
+        <a:srgbClr val="D5E0E7"/>
       </a:accent5>
       <a:accent6>
-        <a:srgbClr val="D5E0E7"/>
+        <a:srgbClr val="8A97A3"/>
       </a:accent6>
       <a:hlink>
         <a:srgbClr val="0563C1"/>
